--- a/tutor-time/fuel-and-focus/downloads/Fuel_and_Focus_Lesson_2.pptx
+++ b/tutor-time/fuel-and-focus/downloads/Fuel_and_Focus_Lesson_2.pptx
@@ -7980,7 +7980,7 @@
                 </a:solidFill>
                 <a:latin typeface="Karla"/>
               </a:rPr>
-              <a:t>THE ONLY TEST THAT COUNTS</a:t>
+              <a:t>ONE MORE TEST</a:t>
             </a:r>
           </a:p>
         </p:txBody>
@@ -10057,7 +10057,7 @@
                 </a:solidFill>
                 <a:latin typeface="Karla"/>
               </a:rPr>
-              <a:t>The best ones go into the class collection, and you all get a copy of it.</a:t>
+              <a:t>Every card that hits all four goes into the class collection, and you all get a copy.</a:t>
             </a:r>
           </a:p>
         </p:txBody>
@@ -11313,7 +11313,7 @@
                 </a:solidFill>
                 <a:latin typeface="Karla"/>
               </a:rPr>
-              <a:t>Clearing up takes four minutes, so build it in.</a:t>
+              <a:t>Clearing up takes three minutes, so build it in.</a:t>
             </a:r>
           </a:p>
         </p:txBody>

--- a/tutor-time/fuel-and-focus/downloads/Fuel_and_Focus_Lesson_2.pptx
+++ b/tutor-time/fuel-and-focus/downloads/Fuel_and_Focus_Lesson_2.pptx
@@ -3207,7 +3207,7 @@
                 <a:solidFill>
                   <a:srgbClr val="256B4A"/>
                 </a:solidFill>
-                <a:latin typeface="Karla"/>
+                <a:latin typeface="Calibri"/>
               </a:rPr>
               <a:t>FUEL AND FOCUS  ·  LESSON 2 OF 3</a:t>
             </a:r>
@@ -3245,11 +3245,11 @@
               </a:spcAft>
             </a:pPr>
             <a:r>
-              <a:rPr sz="3400" b="1" i="0">
+              <a:rPr sz="3400" b="0" i="0">
                 <a:solidFill>
                   <a:srgbClr val="256B4A"/>
                 </a:solidFill>
-                <a:latin typeface="Libre Caslon Display"/>
+                <a:latin typeface="Georgia"/>
               </a:rPr>
               <a:t>Build one that lasts</a:t>
             </a:r>
@@ -3335,7 +3335,7 @@
                 <a:solidFill>
                   <a:srgbClr val="5F6B64"/>
                 </a:solidFill>
-                <a:latin typeface="Karla"/>
+                <a:latin typeface="Calibri"/>
               </a:rPr>
               <a:t>You wrote the criteria last week. Now make something</a:t>
             </a:r>
@@ -3345,7 +3345,7 @@
                 <a:solidFill>
                   <a:srgbClr val="5F6B64"/>
                 </a:solidFill>
-                <a:latin typeface="Karla"/>
+                <a:latin typeface="Calibri"/>
               </a:rPr>
               <a:t>that meets them, and prove that it does.</a:t>
             </a:r>
@@ -3387,7 +3387,7 @@
                 <a:solidFill>
                   <a:srgbClr val="98A29B"/>
                 </a:solidFill>
-                <a:latin typeface="Karla"/>
+                <a:latin typeface="Calibri"/>
               </a:rPr>
               <a:t>Healthy Body, Healthy Mind</a:t>
             </a:r>
@@ -3453,7 +3453,7 @@
                 <a:solidFill>
                   <a:srgbClr val="98A29B"/>
                 </a:solidFill>
-                <a:latin typeface="Karla"/>
+                <a:latin typeface="Calibri"/>
               </a:rPr>
               <a:t>The Pastoral Guide</a:t>
             </a:r>
@@ -3495,7 +3495,7 @@
                 <a:solidFill>
                   <a:srgbClr val="98A29B"/>
                 </a:solidFill>
-                <a:latin typeface="Karla"/>
+                <a:latin typeface="Calibri"/>
               </a:rPr>
               <a:t>1 / 17</a:t>
             </a:r>
@@ -3599,97 +3599,9 @@
                 <a:solidFill>
                   <a:srgbClr val="CBDFD6"/>
                 </a:solidFill>
-                <a:latin typeface="Karla"/>
+                <a:latin typeface="Calibri"/>
               </a:rPr>
               <a:t>CLICK THIS NEAR THE END</a:t>
-            </a:r>
-          </a:p>
-        </p:txBody>
-      </p:sp>
-      <p:sp>
-        <p:nvSpPr>
-          <p:cNvPr id="4" name="Rounded Rectangle 3"/>
-          <p:cNvSpPr/>
-          <p:nvPr/>
-        </p:nvSpPr>
-        <p:spPr>
-          <a:xfrm>
-            <a:off x="7086600" y="530352"/>
-            <a:ext cx="1371600" cy="347472"/>
-          </a:xfrm>
-          <a:prstGeom prst="roundRect">
-            <a:avLst>
-              <a:gd name="adj" fmla="val 50000"/>
-            </a:avLst>
-          </a:prstGeom>
-          <a:solidFill>
-            <a:srgbClr val="FFFDF7"/>
-          </a:solidFill>
-          <a:ln>
-            <a:noFill/>
-          </a:ln>
-          <a:effectLst/>
-        </p:spPr>
-        <p:style>
-          <a:lnRef idx="1">
-            <a:schemeClr val="accent1"/>
-          </a:lnRef>
-          <a:fillRef idx="3">
-            <a:schemeClr val="accent1"/>
-          </a:fillRef>
-          <a:effectRef idx="2">
-            <a:schemeClr val="accent1"/>
-          </a:effectRef>
-          <a:fontRef idx="minor">
-            <a:schemeClr val="lt1"/>
-          </a:fontRef>
-        </p:style>
-        <p:txBody>
-          <a:bodyPr rtlCol="0" anchor="ctr"/>
-          <a:lstStyle/>
-          <a:p>
-            <a:pPr algn="ctr"/>
-          </a:p>
-        </p:txBody>
-      </p:sp>
-      <p:sp>
-        <p:nvSpPr>
-          <p:cNvPr id="5" name="TextBox 4"/>
-          <p:cNvSpPr txBox="1"/>
-          <p:nvPr/>
-        </p:nvSpPr>
-        <p:spPr>
-          <a:xfrm>
-            <a:off x="7086600" y="589788"/>
-            <a:ext cx="1371600" cy="237744"/>
-          </a:xfrm>
-          <a:prstGeom prst="rect">
-            <a:avLst/>
-          </a:prstGeom>
-          <a:noFill/>
-        </p:spPr>
-        <p:txBody>
-          <a:bodyPr wrap="square" lIns="0" rIns="0" tIns="0" bIns="0" anchor="t">
-            <a:spAutoFit/>
-          </a:bodyPr>
-          <a:lstStyle/>
-          <a:p>
-            <a:pPr algn="ctr">
-              <a:lnSpc>
-                <a:spcPct val="125000"/>
-              </a:lnSpc>
-              <a:spcAft>
-                <a:spcPts val="0"/>
-              </a:spcAft>
-            </a:pPr>
-            <a:r>
-              <a:rPr sz="1000" b="1" i="0" spc="100">
-                <a:solidFill>
-                  <a:srgbClr val="256B4A"/>
-                </a:solidFill>
-                <a:latin typeface="Karla"/>
-              </a:rPr>
-              <a:t>CLEAR UP</a:t>
             </a:r>
           </a:p>
         </p:txBody>
@@ -3725,11 +3637,11 @@
               </a:spcAft>
             </a:pPr>
             <a:r>
-              <a:rPr sz="3800" b="1" i="0">
+              <a:rPr sz="3800" b="0" i="0">
                 <a:solidFill>
                   <a:srgbClr val="FFFDF7"/>
                 </a:solidFill>
-                <a:latin typeface="Libre Caslon Display"/>
+                <a:latin typeface="Georgia"/>
               </a:rPr>
               <a:t>Three minutes left</a:t>
             </a:r>
@@ -3819,7 +3731,7 @@
                 <a:solidFill>
                   <a:srgbClr val="256B4A"/>
                 </a:solidFill>
-                <a:latin typeface="Karla"/>
+                <a:latin typeface="Calibri"/>
               </a:rPr>
               <a:t>Finish what you are holding. Do not start anything new.</a:t>
             </a:r>
@@ -3909,7 +3821,7 @@
                 <a:solidFill>
                   <a:srgbClr val="256B4A"/>
                 </a:solidFill>
-                <a:latin typeface="Karla"/>
+                <a:latin typeface="Calibri"/>
               </a:rPr>
               <a:t>Everything reusable back on the trolley, everything else in the bin.</a:t>
             </a:r>
@@ -3999,7 +3911,7 @@
                 <a:solidFill>
                   <a:srgbClr val="256B4A"/>
                 </a:solidFill>
-                <a:latin typeface="Karla"/>
+                <a:latin typeface="Calibri"/>
               </a:rPr>
               <a:t>Wipe your table. Then sit down with your sheet out.</a:t>
             </a:r>
@@ -4041,7 +3953,7 @@
                 <a:solidFill>
                   <a:srgbClr val="FFFDF7"/>
                 </a:solidFill>
-                <a:latin typeface="Karla"/>
+                <a:latin typeface="Calibri"/>
               </a:rPr>
               <a:t>Nobody eats anything until every table is clear.</a:t>
             </a:r>
@@ -4107,7 +4019,7 @@
                 <a:solidFill>
                   <a:srgbClr val="CBDFD6"/>
                 </a:solidFill>
-                <a:latin typeface="Karla"/>
+                <a:latin typeface="Calibri"/>
               </a:rPr>
               <a:t>The Pastoral Guide</a:t>
             </a:r>
@@ -4149,7 +4061,7 @@
                 <a:solidFill>
                   <a:srgbClr val="CBDFD6"/>
                 </a:solidFill>
-                <a:latin typeface="Karla"/>
+                <a:latin typeface="Calibri"/>
               </a:rPr>
               <a:t>10 / 17</a:t>
             </a:r>
@@ -4253,97 +4165,9 @@
                 <a:solidFill>
                   <a:srgbClr val="256B4A"/>
                 </a:solidFill>
-                <a:latin typeface="Karla"/>
+                <a:latin typeface="Calibri"/>
               </a:rPr>
               <a:t>BEFORE YOU EAT IT</a:t>
-            </a:r>
-          </a:p>
-        </p:txBody>
-      </p:sp>
-      <p:sp>
-        <p:nvSpPr>
-          <p:cNvPr id="4" name="Rounded Rectangle 3"/>
-          <p:cNvSpPr/>
-          <p:nvPr/>
-        </p:nvSpPr>
-        <p:spPr>
-          <a:xfrm>
-            <a:off x="7086600" y="530352"/>
-            <a:ext cx="1371600" cy="347472"/>
-          </a:xfrm>
-          <a:prstGeom prst="roundRect">
-            <a:avLst>
-              <a:gd name="adj" fmla="val 50000"/>
-            </a:avLst>
-          </a:prstGeom>
-          <a:solidFill>
-            <a:srgbClr val="EEF3F1"/>
-          </a:solidFill>
-          <a:ln>
-            <a:noFill/>
-          </a:ln>
-          <a:effectLst/>
-        </p:spPr>
-        <p:style>
-          <a:lnRef idx="1">
-            <a:schemeClr val="accent1"/>
-          </a:lnRef>
-          <a:fillRef idx="3">
-            <a:schemeClr val="accent1"/>
-          </a:fillRef>
-          <a:effectRef idx="2">
-            <a:schemeClr val="accent1"/>
-          </a:effectRef>
-          <a:fontRef idx="minor">
-            <a:schemeClr val="lt1"/>
-          </a:fontRef>
-        </p:style>
-        <p:txBody>
-          <a:bodyPr rtlCol="0" anchor="ctr"/>
-          <a:lstStyle/>
-          <a:p>
-            <a:pPr algn="ctr"/>
-          </a:p>
-        </p:txBody>
-      </p:sp>
-      <p:sp>
-        <p:nvSpPr>
-          <p:cNvPr id="5" name="TextBox 4"/>
-          <p:cNvSpPr txBox="1"/>
-          <p:nvPr/>
-        </p:nvSpPr>
-        <p:spPr>
-          <a:xfrm>
-            <a:off x="7086600" y="589788"/>
-            <a:ext cx="1371600" cy="237744"/>
-          </a:xfrm>
-          <a:prstGeom prst="rect">
-            <a:avLst/>
-          </a:prstGeom>
-          <a:noFill/>
-        </p:spPr>
-        <p:txBody>
-          <a:bodyPr wrap="square" lIns="0" rIns="0" tIns="0" bIns="0" anchor="t">
-            <a:spAutoFit/>
-          </a:bodyPr>
-          <a:lstStyle/>
-          <a:p>
-            <a:pPr algn="ctr">
-              <a:lnSpc>
-                <a:spcPct val="125000"/>
-              </a:lnSpc>
-              <a:spcAft>
-                <a:spcPts val="0"/>
-              </a:spcAft>
-            </a:pPr>
-            <a:r>
-              <a:rPr sz="1000" b="1" i="0" spc="100">
-                <a:solidFill>
-                  <a:srgbClr val="256B4A"/>
-                </a:solidFill>
-                <a:latin typeface="Karla"/>
-              </a:rPr>
-              <a:t>PROVE IT</a:t>
             </a:r>
           </a:p>
         </p:txBody>
@@ -4379,11 +4203,11 @@
               </a:spcAft>
             </a:pPr>
             <a:r>
-              <a:rPr sz="3000" b="1" i="0">
+              <a:rPr sz="3000" b="0" i="0">
                 <a:solidFill>
                   <a:srgbClr val="2C3A33"/>
                 </a:solidFill>
-                <a:latin typeface="Libre Caslon Display"/>
+                <a:latin typeface="Georgia"/>
               </a:rPr>
               <a:t>Does it actually meet them?</a:t>
             </a:r>
@@ -4425,7 +4249,7 @@
                 <a:solidFill>
                   <a:srgbClr val="5F6B64"/>
                 </a:solidFill>
-                <a:latin typeface="Karla"/>
+                <a:latin typeface="Calibri"/>
               </a:rPr>
               <a:t>On your sheet, name the ingredient doing each of the four jobs. One word each is enough.</a:t>
             </a:r>
@@ -4555,11 +4379,11 @@
               </a:spcAft>
             </a:pPr>
             <a:r>
-              <a:rPr sz="1200" b="1" i="0">
+              <a:rPr sz="1200" b="0" i="0">
                 <a:solidFill>
                   <a:srgbClr val="FFFDF7"/>
                 </a:solidFill>
-                <a:latin typeface="Libre Caslon Display"/>
+                <a:latin typeface="Georgia"/>
               </a:rPr>
               <a:t>1</a:t>
             </a:r>
@@ -4597,11 +4421,11 @@
               </a:spcAft>
             </a:pPr>
             <a:r>
-              <a:rPr sz="1250" b="1" i="0">
+              <a:rPr sz="1250" b="0" i="0">
                 <a:solidFill>
                   <a:srgbClr val="256B4A"/>
                 </a:solidFill>
-                <a:latin typeface="Libre Caslon Display"/>
+                <a:latin typeface="Georgia"/>
               </a:rPr>
               <a:t>Protein</a:t>
             </a:r>
@@ -4731,11 +4555,11 @@
               </a:spcAft>
             </a:pPr>
             <a:r>
-              <a:rPr sz="1200" b="1" i="0">
+              <a:rPr sz="1200" b="0" i="0">
                 <a:solidFill>
                   <a:srgbClr val="FFFDF7"/>
                 </a:solidFill>
-                <a:latin typeface="Libre Caslon Display"/>
+                <a:latin typeface="Georgia"/>
               </a:rPr>
               <a:t>2</a:t>
             </a:r>
@@ -4773,11 +4597,11 @@
               </a:spcAft>
             </a:pPr>
             <a:r>
-              <a:rPr sz="1250" b="1" i="0">
+              <a:rPr sz="1250" b="0" i="0">
                 <a:solidFill>
                   <a:srgbClr val="256B4A"/>
                 </a:solidFill>
-                <a:latin typeface="Libre Caslon Display"/>
+                <a:latin typeface="Georgia"/>
               </a:rPr>
               <a:t>Fibre</a:t>
             </a:r>
@@ -4907,11 +4731,11 @@
               </a:spcAft>
             </a:pPr>
             <a:r>
-              <a:rPr sz="1200" b="1" i="0">
+              <a:rPr sz="1200" b="0" i="0">
                 <a:solidFill>
                   <a:srgbClr val="FFFDF7"/>
                 </a:solidFill>
-                <a:latin typeface="Libre Caslon Display"/>
+                <a:latin typeface="Georgia"/>
               </a:rPr>
               <a:t>3</a:t>
             </a:r>
@@ -4949,11 +4773,11 @@
               </a:spcAft>
             </a:pPr>
             <a:r>
-              <a:rPr sz="1250" b="1" i="0">
+              <a:rPr sz="1250" b="0" i="0">
                 <a:solidFill>
                   <a:srgbClr val="256B4A"/>
                 </a:solidFill>
-                <a:latin typeface="Libre Caslon Display"/>
+                <a:latin typeface="Georgia"/>
               </a:rPr>
               <a:t>A slow carb</a:t>
             </a:r>
@@ -5083,11 +4907,11 @@
               </a:spcAft>
             </a:pPr>
             <a:r>
-              <a:rPr sz="1200" b="1" i="0">
+              <a:rPr sz="1200" b="0" i="0">
                 <a:solidFill>
                   <a:srgbClr val="FFFDF7"/>
                 </a:solidFill>
-                <a:latin typeface="Libre Caslon Display"/>
+                <a:latin typeface="Georgia"/>
               </a:rPr>
               <a:t>4</a:t>
             </a:r>
@@ -5125,11 +4949,11 @@
               </a:spcAft>
             </a:pPr>
             <a:r>
-              <a:rPr sz="1250" b="1" i="0">
+              <a:rPr sz="1250" b="0" i="0">
                 <a:solidFill>
                   <a:srgbClr val="256B4A"/>
                 </a:solidFill>
-                <a:latin typeface="Libre Caslon Display"/>
+                <a:latin typeface="Georgia"/>
               </a:rPr>
               <a:t>Healthy fats</a:t>
             </a:r>
@@ -5219,7 +5043,7 @@
                 <a:solidFill>
                   <a:srgbClr val="256B4A"/>
                 </a:solidFill>
-                <a:latin typeface="Karla"/>
+                <a:latin typeface="Calibri"/>
               </a:rPr>
               <a:t>If one of the four has nothing next to it, what single ingredient would you add to fix it? Write that down too.</a:t>
             </a:r>
@@ -5285,7 +5109,7 @@
                 <a:solidFill>
                   <a:srgbClr val="98A29B"/>
                 </a:solidFill>
-                <a:latin typeface="Karla"/>
+                <a:latin typeface="Calibri"/>
               </a:rPr>
               <a:t>The Pastoral Guide</a:t>
             </a:r>
@@ -5327,7 +5151,7 @@
                 <a:solidFill>
                   <a:srgbClr val="98A29B"/>
                 </a:solidFill>
-                <a:latin typeface="Karla"/>
+                <a:latin typeface="Calibri"/>
               </a:rPr>
               <a:t>11 / 17</a:t>
             </a:r>
@@ -5431,97 +5255,9 @@
                 <a:solidFill>
                   <a:srgbClr val="256B4A"/>
                 </a:solidFill>
-                <a:latin typeface="Karla"/>
+                <a:latin typeface="Calibri"/>
               </a:rPr>
               <a:t>BACK TO THE GRAPH FROM LESSON ONE</a:t>
-            </a:r>
-          </a:p>
-        </p:txBody>
-      </p:sp>
-      <p:sp>
-        <p:nvSpPr>
-          <p:cNvPr id="4" name="Rounded Rectangle 3"/>
-          <p:cNvSpPr/>
-          <p:nvPr/>
-        </p:nvSpPr>
-        <p:spPr>
-          <a:xfrm>
-            <a:off x="7086600" y="530352"/>
-            <a:ext cx="1371600" cy="347472"/>
-          </a:xfrm>
-          <a:prstGeom prst="roundRect">
-            <a:avLst>
-              <a:gd name="adj" fmla="val 50000"/>
-            </a:avLst>
-          </a:prstGeom>
-          <a:solidFill>
-            <a:srgbClr val="EEF3F1"/>
-          </a:solidFill>
-          <a:ln>
-            <a:noFill/>
-          </a:ln>
-          <a:effectLst/>
-        </p:spPr>
-        <p:style>
-          <a:lnRef idx="1">
-            <a:schemeClr val="accent1"/>
-          </a:lnRef>
-          <a:fillRef idx="3">
-            <a:schemeClr val="accent1"/>
-          </a:fillRef>
-          <a:effectRef idx="2">
-            <a:schemeClr val="accent1"/>
-          </a:effectRef>
-          <a:fontRef idx="minor">
-            <a:schemeClr val="lt1"/>
-          </a:fontRef>
-        </p:style>
-        <p:txBody>
-          <a:bodyPr rtlCol="0" anchor="ctr"/>
-          <a:lstStyle/>
-          <a:p>
-            <a:pPr algn="ctr"/>
-          </a:p>
-        </p:txBody>
-      </p:sp>
-      <p:sp>
-        <p:nvSpPr>
-          <p:cNvPr id="5" name="TextBox 4"/>
-          <p:cNvSpPr txBox="1"/>
-          <p:nvPr/>
-        </p:nvSpPr>
-        <p:spPr>
-          <a:xfrm>
-            <a:off x="7086600" y="589788"/>
-            <a:ext cx="1371600" cy="237744"/>
-          </a:xfrm>
-          <a:prstGeom prst="rect">
-            <a:avLst/>
-          </a:prstGeom>
-          <a:noFill/>
-        </p:spPr>
-        <p:txBody>
-          <a:bodyPr wrap="square" lIns="0" rIns="0" tIns="0" bIns="0" anchor="t">
-            <a:spAutoFit/>
-          </a:bodyPr>
-          <a:lstStyle/>
-          <a:p>
-            <a:pPr algn="ctr">
-              <a:lnSpc>
-                <a:spcPct val="125000"/>
-              </a:lnSpc>
-              <a:spcAft>
-                <a:spcPts val="0"/>
-              </a:spcAft>
-            </a:pPr>
-            <a:r>
-              <a:rPr sz="1000" b="1" i="0" spc="100">
-                <a:solidFill>
-                  <a:srgbClr val="256B4A"/>
-                </a:solidFill>
-                <a:latin typeface="Karla"/>
-              </a:rPr>
-              <a:t>SCIENCE</a:t>
             </a:r>
           </a:p>
         </p:txBody>
@@ -5557,11 +5293,11 @@
               </a:spcAft>
             </a:pPr>
             <a:r>
-              <a:rPr sz="3200" b="1" i="0">
+              <a:rPr sz="3200" b="0" i="0">
                 <a:solidFill>
                   <a:srgbClr val="2C3A33"/>
                 </a:solidFill>
-                <a:latin typeface="Libre Caslon Display"/>
+                <a:latin typeface="Georgia"/>
               </a:rPr>
               <a:t>What you just built</a:t>
             </a:r>
@@ -5735,7 +5471,7 @@
                 <a:solidFill>
                   <a:srgbClr val="5F6B64"/>
                 </a:solidFill>
-                <a:latin typeface="Karla"/>
+                <a:latin typeface="Calibri"/>
               </a:rPr>
               <a:t>BLOOD SUGAR</a:t>
             </a:r>
@@ -5777,7 +5513,7 @@
                 <a:solidFill>
                   <a:srgbClr val="5F6B64"/>
                 </a:solidFill>
-                <a:latin typeface="Karla"/>
+                <a:latin typeface="Calibri"/>
               </a:rPr>
               <a:t>TIME</a:t>
             </a:r>
@@ -6770,7 +6506,7 @@
                 <a:solidFill>
                   <a:srgbClr val="98A29B"/>
                 </a:solidFill>
-                <a:latin typeface="Karla"/>
+                <a:latin typeface="Calibri"/>
               </a:rPr>
               <a:t>The biscuit</a:t>
             </a:r>
@@ -6812,7 +6548,7 @@
                 <a:solidFill>
                   <a:srgbClr val="256B4A"/>
                 </a:solidFill>
-                <a:latin typeface="Karla"/>
+                <a:latin typeface="Calibri"/>
               </a:rPr>
               <a:t>The one you just made</a:t>
             </a:r>
@@ -6854,7 +6590,7 @@
                 <a:solidFill>
                   <a:srgbClr val="256B4A"/>
                 </a:solidFill>
-                <a:latin typeface="Karla"/>
+                <a:latin typeface="Calibri"/>
               </a:rPr>
               <a:t>Same energy, spread over hours. No spike, so nothing to fall from.</a:t>
             </a:r>
@@ -6920,7 +6656,7 @@
                 <a:solidFill>
                   <a:srgbClr val="98A29B"/>
                 </a:solidFill>
-                <a:latin typeface="Karla"/>
+                <a:latin typeface="Calibri"/>
               </a:rPr>
               <a:t>The Pastoral Guide</a:t>
             </a:r>
@@ -6962,7 +6698,7 @@
                 <a:solidFill>
                   <a:srgbClr val="98A29B"/>
                 </a:solidFill>
-                <a:latin typeface="Karla"/>
+                <a:latin typeface="Calibri"/>
               </a:rPr>
               <a:t>12 / 17</a:t>
             </a:r>
@@ -7066,97 +6802,9 @@
                 <a:solidFill>
                   <a:srgbClr val="256B4A"/>
                 </a:solidFill>
-                <a:latin typeface="Karla"/>
+                <a:latin typeface="Calibri"/>
               </a:rPr>
               <a:t>NOW YOU CAN</a:t>
-            </a:r>
-          </a:p>
-        </p:txBody>
-      </p:sp>
-      <p:sp>
-        <p:nvSpPr>
-          <p:cNvPr id="4" name="Rounded Rectangle 3"/>
-          <p:cNvSpPr/>
-          <p:nvPr/>
-        </p:nvSpPr>
-        <p:spPr>
-          <a:xfrm>
-            <a:off x="7086600" y="530352"/>
-            <a:ext cx="1371600" cy="347472"/>
-          </a:xfrm>
-          <a:prstGeom prst="roundRect">
-            <a:avLst>
-              <a:gd name="adj" fmla="val 50000"/>
-            </a:avLst>
-          </a:prstGeom>
-          <a:solidFill>
-            <a:srgbClr val="EEF3F1"/>
-          </a:solidFill>
-          <a:ln>
-            <a:noFill/>
-          </a:ln>
-          <a:effectLst/>
-        </p:spPr>
-        <p:style>
-          <a:lnRef idx="1">
-            <a:schemeClr val="accent1"/>
-          </a:lnRef>
-          <a:fillRef idx="3">
-            <a:schemeClr val="accent1"/>
-          </a:fillRef>
-          <a:effectRef idx="2">
-            <a:schemeClr val="accent1"/>
-          </a:effectRef>
-          <a:fontRef idx="minor">
-            <a:schemeClr val="lt1"/>
-          </a:fontRef>
-        </p:style>
-        <p:txBody>
-          <a:bodyPr rtlCol="0" anchor="ctr"/>
-          <a:lstStyle/>
-          <a:p>
-            <a:pPr algn="ctr"/>
-          </a:p>
-        </p:txBody>
-      </p:sp>
-      <p:sp>
-        <p:nvSpPr>
-          <p:cNvPr id="5" name="TextBox 4"/>
-          <p:cNvSpPr txBox="1"/>
-          <p:nvPr/>
-        </p:nvSpPr>
-        <p:spPr>
-          <a:xfrm>
-            <a:off x="7086600" y="589788"/>
-            <a:ext cx="1371600" cy="237744"/>
-          </a:xfrm>
-          <a:prstGeom prst="rect">
-            <a:avLst/>
-          </a:prstGeom>
-          <a:noFill/>
-        </p:spPr>
-        <p:txBody>
-          <a:bodyPr wrap="square" lIns="0" rIns="0" tIns="0" bIns="0" anchor="t">
-            <a:spAutoFit/>
-          </a:bodyPr>
-          <a:lstStyle/>
-          <a:p>
-            <a:pPr algn="ctr">
-              <a:lnSpc>
-                <a:spcPct val="125000"/>
-              </a:lnSpc>
-              <a:spcAft>
-                <a:spcPts val="0"/>
-              </a:spcAft>
-            </a:pPr>
-            <a:r>
-              <a:rPr sz="1000" b="1" i="0" spc="100">
-                <a:solidFill>
-                  <a:srgbClr val="256B4A"/>
-                </a:solidFill>
-                <a:latin typeface="Karla"/>
-              </a:rPr>
-              <a:t>EAT IT</a:t>
             </a:r>
           </a:p>
         </p:txBody>
@@ -7192,11 +6840,11 @@
               </a:spcAft>
             </a:pPr>
             <a:r>
-              <a:rPr sz="3200" b="1" i="0">
+              <a:rPr sz="3200" b="0" i="0">
                 <a:solidFill>
                   <a:srgbClr val="2C3A33"/>
                 </a:solidFill>
-                <a:latin typeface="Libre Caslon Display"/>
+                <a:latin typeface="Georgia"/>
               </a:rPr>
               <a:t>Eat it, and be honest</a:t>
             </a:r>
@@ -7326,11 +6974,11 @@
               </a:spcAft>
             </a:pPr>
             <a:r>
-              <a:rPr sz="1200" b="1" i="0">
+              <a:rPr sz="1200" b="0" i="0">
                 <a:solidFill>
                   <a:srgbClr val="FFFDF7"/>
                 </a:solidFill>
-                <a:latin typeface="Libre Caslon Display"/>
+                <a:latin typeface="Georgia"/>
               </a:rPr>
               <a:t>1</a:t>
             </a:r>
@@ -7372,7 +7020,7 @@
                 <a:solidFill>
                   <a:srgbClr val="2C3A33"/>
                 </a:solidFill>
-                <a:latin typeface="Karla"/>
+                <a:latin typeface="Calibri"/>
               </a:rPr>
               <a:t>Would you actually eat this at break, or is it a lesson thing?</a:t>
             </a:r>
@@ -7502,11 +7150,11 @@
               </a:spcAft>
             </a:pPr>
             <a:r>
-              <a:rPr sz="1200" b="1" i="0">
+              <a:rPr sz="1200" b="0" i="0">
                 <a:solidFill>
                   <a:srgbClr val="FFFDF7"/>
                 </a:solidFill>
-                <a:latin typeface="Libre Caslon Display"/>
+                <a:latin typeface="Georgia"/>
               </a:rPr>
               <a:t>2</a:t>
             </a:r>
@@ -7548,7 +7196,7 @@
                 <a:solidFill>
                   <a:srgbClr val="2C3A33"/>
                 </a:solidFill>
-                <a:latin typeface="Karla"/>
+                <a:latin typeface="Calibri"/>
               </a:rPr>
               <a:t>What would you change about it, and why that?</a:t>
             </a:r>
@@ -7678,11 +7326,11 @@
               </a:spcAft>
             </a:pPr>
             <a:r>
-              <a:rPr sz="1200" b="1" i="0">
+              <a:rPr sz="1200" b="0" i="0">
                 <a:solidFill>
                   <a:srgbClr val="FFFDF7"/>
                 </a:solidFill>
-                <a:latin typeface="Libre Caslon Display"/>
+                <a:latin typeface="Georgia"/>
               </a:rPr>
               <a:t>3</a:t>
             </a:r>
@@ -7724,7 +7372,7 @@
                 <a:solidFill>
                   <a:srgbClr val="2C3A33"/>
                 </a:solidFill>
-                <a:latin typeface="Karla"/>
+                <a:latin typeface="Calibri"/>
               </a:rPr>
               <a:t>How long do you think it will hold you? Say a number.</a:t>
             </a:r>
@@ -7766,7 +7414,7 @@
                 <a:solidFill>
                   <a:srgbClr val="256B4A"/>
                 </a:solidFill>
-                <a:latin typeface="Karla"/>
+                <a:latin typeface="Calibri"/>
               </a:rPr>
               <a:t>The first question is the real test, because a snack you would never choose does not count.</a:t>
             </a:r>
@@ -7832,7 +7480,7 @@
                 <a:solidFill>
                   <a:srgbClr val="98A29B"/>
                 </a:solidFill>
-                <a:latin typeface="Karla"/>
+                <a:latin typeface="Calibri"/>
               </a:rPr>
               <a:t>The Pastoral Guide</a:t>
             </a:r>
@@ -7874,7 +7522,7 @@
                 <a:solidFill>
                   <a:srgbClr val="98A29B"/>
                 </a:solidFill>
-                <a:latin typeface="Karla"/>
+                <a:latin typeface="Calibri"/>
               </a:rPr>
               <a:t>13 / 17</a:t>
             </a:r>
@@ -7978,97 +7626,9 @@
                 <a:solidFill>
                   <a:srgbClr val="256B4A"/>
                 </a:solidFill>
-                <a:latin typeface="Karla"/>
+                <a:latin typeface="Calibri"/>
               </a:rPr>
               <a:t>ONE MORE TEST</a:t>
-            </a:r>
-          </a:p>
-        </p:txBody>
-      </p:sp>
-      <p:sp>
-        <p:nvSpPr>
-          <p:cNvPr id="4" name="Rounded Rectangle 3"/>
-          <p:cNvSpPr/>
-          <p:nvPr/>
-        </p:nvSpPr>
-        <p:spPr>
-          <a:xfrm>
-            <a:off x="6986016" y="530352"/>
-            <a:ext cx="1472184" cy="347472"/>
-          </a:xfrm>
-          <a:prstGeom prst="roundRect">
-            <a:avLst>
-              <a:gd name="adj" fmla="val 50000"/>
-            </a:avLst>
-          </a:prstGeom>
-          <a:solidFill>
-            <a:srgbClr val="EEF3F1"/>
-          </a:solidFill>
-          <a:ln>
-            <a:noFill/>
-          </a:ln>
-          <a:effectLst/>
-        </p:spPr>
-        <p:style>
-          <a:lnRef idx="1">
-            <a:schemeClr val="accent1"/>
-          </a:lnRef>
-          <a:fillRef idx="3">
-            <a:schemeClr val="accent1"/>
-          </a:fillRef>
-          <a:effectRef idx="2">
-            <a:schemeClr val="accent1"/>
-          </a:effectRef>
-          <a:fontRef idx="minor">
-            <a:schemeClr val="lt1"/>
-          </a:fontRef>
-        </p:style>
-        <p:txBody>
-          <a:bodyPr rtlCol="0" anchor="ctr"/>
-          <a:lstStyle/>
-          <a:p>
-            <a:pPr algn="ctr"/>
-          </a:p>
-        </p:txBody>
-      </p:sp>
-      <p:sp>
-        <p:nvSpPr>
-          <p:cNvPr id="5" name="TextBox 4"/>
-          <p:cNvSpPr txBox="1"/>
-          <p:nvPr/>
-        </p:nvSpPr>
-        <p:spPr>
-          <a:xfrm>
-            <a:off x="6986016" y="589788"/>
-            <a:ext cx="1472184" cy="237744"/>
-          </a:xfrm>
-          <a:prstGeom prst="rect">
-            <a:avLst/>
-          </a:prstGeom>
-          <a:noFill/>
-        </p:spPr>
-        <p:txBody>
-          <a:bodyPr wrap="square" lIns="0" rIns="0" tIns="0" bIns="0" anchor="t">
-            <a:spAutoFit/>
-          </a:bodyPr>
-          <a:lstStyle/>
-          <a:p>
-            <a:pPr algn="ctr">
-              <a:lnSpc>
-                <a:spcPct val="125000"/>
-              </a:lnSpc>
-              <a:spcAft>
-                <a:spcPts val="0"/>
-              </a:spcAft>
-            </a:pPr>
-            <a:r>
-              <a:rPr sz="1000" b="1" i="0" spc="100">
-                <a:solidFill>
-                  <a:srgbClr val="256B4A"/>
-                </a:solidFill>
-                <a:latin typeface="Karla"/>
-              </a:rPr>
-              <a:t>SWAP TEST</a:t>
             </a:r>
           </a:p>
         </p:txBody>
@@ -8104,11 +7664,11 @@
               </a:spcAft>
             </a:pPr>
             <a:r>
-              <a:rPr sz="2900" b="1" i="0">
+              <a:rPr sz="2900" b="0" i="0">
                 <a:solidFill>
                   <a:srgbClr val="2C3A33"/>
                 </a:solidFill>
-                <a:latin typeface="Libre Caslon Display"/>
+                <a:latin typeface="Georgia"/>
               </a:rPr>
               <a:t>Against what you usually buy</a:t>
             </a:r>
@@ -8150,7 +7710,7 @@
                 <a:solidFill>
                   <a:srgbClr val="5F6B64"/>
                 </a:solidFill>
-                <a:latin typeface="Karla"/>
+                <a:latin typeface="Calibri"/>
               </a:rPr>
               <a:t>Think of what you would actually have bought at break today. Three straight comparisons.</a:t>
             </a:r>
@@ -8236,11 +7796,11 @@
               </a:spcAft>
             </a:pPr>
             <a:r>
-              <a:rPr sz="1700" b="1" i="0">
+              <a:rPr sz="1700" b="0" i="0">
                 <a:solidFill>
                   <a:srgbClr val="256B4A"/>
                 </a:solidFill>
-                <a:latin typeface="Libre Caslon Display"/>
+                <a:latin typeface="Georgia"/>
               </a:rPr>
               <a:t>Money</a:t>
             </a:r>
@@ -8282,7 +7842,7 @@
                 <a:solidFill>
                   <a:srgbClr val="5F6B64"/>
                 </a:solidFill>
-                <a:latin typeface="Karla"/>
+                <a:latin typeface="Calibri"/>
               </a:rPr>
               <a:t>Which one costs less?</a:t>
             </a:r>
@@ -8368,11 +7928,11 @@
               </a:spcAft>
             </a:pPr>
             <a:r>
-              <a:rPr sz="1700" b="1" i="0">
+              <a:rPr sz="1700" b="0" i="0">
                 <a:solidFill>
                   <a:srgbClr val="256B4A"/>
                 </a:solidFill>
-                <a:latin typeface="Libre Caslon Display"/>
+                <a:latin typeface="Georgia"/>
               </a:rPr>
               <a:t>Time</a:t>
             </a:r>
@@ -8414,7 +7974,7 @@
                 <a:solidFill>
                   <a:srgbClr val="5F6B64"/>
                 </a:solidFill>
-                <a:latin typeface="Karla"/>
+                <a:latin typeface="Calibri"/>
               </a:rPr>
               <a:t>Which one takes less time, including buying it?</a:t>
             </a:r>
@@ -8500,11 +8060,11 @@
               </a:spcAft>
             </a:pPr>
             <a:r>
-              <a:rPr sz="1700" b="1" i="0">
+              <a:rPr sz="1700" b="0" i="0">
                 <a:solidFill>
                   <a:srgbClr val="256B4A"/>
                 </a:solidFill>
-                <a:latin typeface="Libre Caslon Display"/>
+                <a:latin typeface="Georgia"/>
               </a:rPr>
               <a:t>Hold</a:t>
             </a:r>
@@ -8546,7 +8106,7 @@
                 <a:solidFill>
                   <a:srgbClr val="5F6B64"/>
                 </a:solidFill>
-                <a:latin typeface="Karla"/>
+                <a:latin typeface="Calibri"/>
               </a:rPr>
               <a:t>Which one gets you further into the afternoon?</a:t>
             </a:r>
@@ -8588,7 +8148,7 @@
                 <a:solidFill>
                   <a:srgbClr val="256B4A"/>
                 </a:solidFill>
-                <a:latin typeface="Karla"/>
+                <a:latin typeface="Calibri"/>
               </a:rPr>
               <a:t>If it loses on all three, you will never make it again, so it is not a real swap.</a:t>
             </a:r>
@@ -8654,7 +8214,7 @@
                 <a:solidFill>
                   <a:srgbClr val="98A29B"/>
                 </a:solidFill>
-                <a:latin typeface="Karla"/>
+                <a:latin typeface="Calibri"/>
               </a:rPr>
               <a:t>The Pastoral Guide</a:t>
             </a:r>
@@ -8696,7 +8256,7 @@
                 <a:solidFill>
                   <a:srgbClr val="98A29B"/>
                 </a:solidFill>
-                <a:latin typeface="Karla"/>
+                <a:latin typeface="Calibri"/>
               </a:rPr>
               <a:t>14 / 17</a:t>
             </a:r>
@@ -8800,97 +8360,9 @@
                 <a:solidFill>
                   <a:srgbClr val="256B4A"/>
                 </a:solidFill>
-                <a:latin typeface="Karla"/>
+                <a:latin typeface="Calibri"/>
               </a:rPr>
               <a:t>FOR NEXT WEEK</a:t>
-            </a:r>
-          </a:p>
-        </p:txBody>
-      </p:sp>
-      <p:sp>
-        <p:nvSpPr>
-          <p:cNvPr id="4" name="Rounded Rectangle 3"/>
-          <p:cNvSpPr/>
-          <p:nvPr/>
-        </p:nvSpPr>
-        <p:spPr>
-          <a:xfrm>
-            <a:off x="6967728" y="530352"/>
-            <a:ext cx="1490472" cy="347472"/>
-          </a:xfrm>
-          <a:prstGeom prst="roundRect">
-            <a:avLst>
-              <a:gd name="adj" fmla="val 50000"/>
-            </a:avLst>
-          </a:prstGeom>
-          <a:solidFill>
-            <a:srgbClr val="EEF3F1"/>
-          </a:solidFill>
-          <a:ln>
-            <a:noFill/>
-          </a:ln>
-          <a:effectLst/>
-        </p:spPr>
-        <p:style>
-          <a:lnRef idx="1">
-            <a:schemeClr val="accent1"/>
-          </a:lnRef>
-          <a:fillRef idx="3">
-            <a:schemeClr val="accent1"/>
-          </a:fillRef>
-          <a:effectRef idx="2">
-            <a:schemeClr val="accent1"/>
-          </a:effectRef>
-          <a:fontRef idx="minor">
-            <a:schemeClr val="lt1"/>
-          </a:fontRef>
-        </p:style>
-        <p:txBody>
-          <a:bodyPr rtlCol="0" anchor="ctr"/>
-          <a:lstStyle/>
-          <a:p>
-            <a:pPr algn="ctr"/>
-          </a:p>
-        </p:txBody>
-      </p:sp>
-      <p:sp>
-        <p:nvSpPr>
-          <p:cNvPr id="5" name="TextBox 4"/>
-          <p:cNvSpPr txBox="1"/>
-          <p:nvPr/>
-        </p:nvSpPr>
-        <p:spPr>
-          <a:xfrm>
-            <a:off x="6967728" y="589788"/>
-            <a:ext cx="1490472" cy="237744"/>
-          </a:xfrm>
-          <a:prstGeom prst="rect">
-            <a:avLst/>
-          </a:prstGeom>
-          <a:noFill/>
-        </p:spPr>
-        <p:txBody>
-          <a:bodyPr wrap="square" lIns="0" rIns="0" tIns="0" bIns="0" anchor="t">
-            <a:spAutoFit/>
-          </a:bodyPr>
-          <a:lstStyle/>
-          <a:p>
-            <a:pPr algn="ctr">
-              <a:lnSpc>
-                <a:spcPct val="125000"/>
-              </a:lnSpc>
-              <a:spcAft>
-                <a:spcPts val="0"/>
-              </a:spcAft>
-            </a:pPr>
-            <a:r>
-              <a:rPr sz="1000" b="1" i="0" spc="100">
-                <a:solidFill>
-                  <a:srgbClr val="256B4A"/>
-                </a:solidFill>
-                <a:latin typeface="Karla"/>
-              </a:rPr>
-              <a:t>YOUR TURN</a:t>
             </a:r>
           </a:p>
         </p:txBody>
@@ -8926,11 +8398,11 @@
               </a:spcAft>
             </a:pPr>
             <a:r>
-              <a:rPr sz="3200" b="1" i="0">
+              <a:rPr sz="3200" b="0" i="0">
                 <a:solidFill>
                   <a:srgbClr val="2C3A33"/>
                 </a:solidFill>
-                <a:latin typeface="Libre Caslon Display"/>
+                <a:latin typeface="Georgia"/>
               </a:rPr>
               <a:t>Design your own</a:t>
             </a:r>
@@ -8972,7 +8444,7 @@
                 <a:solidFill>
                   <a:srgbClr val="5F6B64"/>
                 </a:solidFill>
-                <a:latin typeface="Karla"/>
+                <a:latin typeface="Calibri"/>
               </a:rPr>
               <a:t>On the recipe card. It has to hit the criteria and be something you would actually eat.</a:t>
             </a:r>
@@ -9058,11 +8530,11 @@
               </a:spcAft>
             </a:pPr>
             <a:r>
-              <a:rPr sz="1350" b="1" i="0">
+              <a:rPr sz="1350" b="0" i="0">
                 <a:solidFill>
                   <a:srgbClr val="256B4A"/>
                 </a:solidFill>
-                <a:latin typeface="Libre Caslon Display"/>
+                <a:latin typeface="Georgia"/>
               </a:rPr>
               <a:t>Write the recipe</a:t>
             </a:r>
@@ -9104,7 +8576,7 @@
                 <a:solidFill>
                   <a:srgbClr val="5F6B64"/>
                 </a:solidFill>
-                <a:latin typeface="Karla"/>
+                <a:latin typeface="Calibri"/>
               </a:rPr>
               <a:t>Ingredients, amounts, and the steps in order.</a:t>
             </a:r>
@@ -9190,11 +8662,11 @@
               </a:spcAft>
             </a:pPr>
             <a:r>
-              <a:rPr sz="1350" b="1" i="0">
+              <a:rPr sz="1350" b="0" i="0">
                 <a:solidFill>
                   <a:srgbClr val="256B4A"/>
                 </a:solidFill>
-                <a:latin typeface="Libre Caslon Display"/>
+                <a:latin typeface="Georgia"/>
               </a:rPr>
               <a:t>Mark the four jobs</a:t>
             </a:r>
@@ -9236,7 +8708,7 @@
                 <a:solidFill>
                   <a:srgbClr val="5F6B64"/>
                 </a:solidFill>
-                <a:latin typeface="Karla"/>
+                <a:latin typeface="Calibri"/>
               </a:rPr>
               <a:t>Which ingredient is the protein, fibre, slow carb and fat.</a:t>
             </a:r>
@@ -9322,11 +8794,11 @@
               </a:spcAft>
             </a:pPr>
             <a:r>
-              <a:rPr sz="1350" b="1" i="0">
+              <a:rPr sz="1350" b="0" i="0">
                 <a:solidFill>
                   <a:srgbClr val="256B4A"/>
                 </a:solidFill>
-                <a:latin typeface="Libre Caslon Display"/>
+                <a:latin typeface="Georgia"/>
               </a:rPr>
               <a:t>Make it if you can</a:t>
             </a:r>
@@ -9368,7 +8840,7 @@
                 <a:solidFill>
                   <a:srgbClr val="5F6B64"/>
                 </a:solidFill>
-                <a:latin typeface="Karla"/>
+                <a:latin typeface="Calibri"/>
               </a:rPr>
               <a:t>At home, if that works for you. If not, the card is enough.</a:t>
             </a:r>
@@ -9410,7 +8882,7 @@
                 <a:solidFill>
                   <a:srgbClr val="256B4A"/>
                 </a:solidFill>
-                <a:latin typeface="Karla"/>
+                <a:latin typeface="Calibri"/>
               </a:rPr>
               <a:t>The card is the homework. Making it at home is a bonus, not the task.</a:t>
             </a:r>
@@ -9476,7 +8948,7 @@
                 <a:solidFill>
                   <a:srgbClr val="98A29B"/>
                 </a:solidFill>
-                <a:latin typeface="Karla"/>
+                <a:latin typeface="Calibri"/>
               </a:rPr>
               <a:t>The Pastoral Guide</a:t>
             </a:r>
@@ -9518,7 +8990,7 @@
                 <a:solidFill>
                   <a:srgbClr val="98A29B"/>
                 </a:solidFill>
-                <a:latin typeface="Karla"/>
+                <a:latin typeface="Calibri"/>
               </a:rPr>
               <a:t>15 / 17</a:t>
             </a:r>
@@ -9622,7 +9094,7 @@
                 <a:solidFill>
                   <a:srgbClr val="CBDFD6"/>
                 </a:solidFill>
-                <a:latin typeface="Karla"/>
+                <a:latin typeface="Calibri"/>
               </a:rPr>
               <a:t>IF YOU REMEMBER ONE THING</a:t>
             </a:r>
@@ -9660,21 +9132,21 @@
               </a:spcAft>
             </a:pPr>
             <a:r>
-              <a:rPr sz="3400" b="1" i="0">
+              <a:rPr sz="3400" b="0" i="0">
                 <a:solidFill>
                   <a:srgbClr val="FFFDF7"/>
                 </a:solidFill>
-                <a:latin typeface="Libre Caslon Display"/>
+                <a:latin typeface="Georgia"/>
               </a:rPr>
               <a:t>You made that in</a:t>
             </a:r>
             <a:br/>
             <a:r>
-              <a:rPr sz="3400" b="1" i="0">
+              <a:rPr sz="3400" b="0" i="0">
                 <a:solidFill>
                   <a:srgbClr val="FFFDF7"/>
                 </a:solidFill>
-                <a:latin typeface="Libre Caslon Display"/>
+                <a:latin typeface="Georgia"/>
               </a:rPr>
               <a:t>fifteen minutes.</a:t>
             </a:r>
@@ -9760,7 +9232,7 @@
                 <a:solidFill>
                   <a:srgbClr val="CBDFD6"/>
                 </a:solidFill>
-                <a:latin typeface="Karla"/>
+                <a:latin typeface="Calibri"/>
               </a:rPr>
               <a:t>Nobody skips this because the cooking is hard.</a:t>
             </a:r>
@@ -9769,7 +9241,7 @@
                 <a:solidFill>
                   <a:srgbClr val="CBDFD6"/>
                 </a:solidFill>
-                <a:latin typeface="Karla"/>
+                <a:latin typeface="Calibri"/>
               </a:rPr>
             </a:br>
             <a:r>
@@ -9777,7 +9249,7 @@
                 <a:solidFill>
                   <a:srgbClr val="CBDFD6"/>
                 </a:solidFill>
-                <a:latin typeface="Karla"/>
+                <a:latin typeface="Calibri"/>
               </a:rPr>
               <a:t>They skip it because they never decided to.</a:t>
             </a:r>
@@ -9843,7 +9315,7 @@
                 <a:solidFill>
                   <a:srgbClr val="CBDFD6"/>
                 </a:solidFill>
-                <a:latin typeface="Karla"/>
+                <a:latin typeface="Calibri"/>
               </a:rPr>
               <a:t>The Pastoral Guide</a:t>
             </a:r>
@@ -9885,7 +9357,7 @@
                 <a:solidFill>
                   <a:srgbClr val="CBDFD6"/>
                 </a:solidFill>
-                <a:latin typeface="Karla"/>
+                <a:latin typeface="Calibri"/>
               </a:rPr>
               <a:t>16 / 17</a:t>
             </a:r>
@@ -10009,11 +9481,11 @@
               </a:spcAft>
             </a:pPr>
             <a:r>
-              <a:rPr sz="2900" b="1" i="0">
+              <a:rPr sz="2900" b="0" i="0">
                 <a:solidFill>
                   <a:srgbClr val="256B4A"/>
                 </a:solidFill>
-                <a:latin typeface="Libre Caslon Display"/>
+                <a:latin typeface="Georgia"/>
               </a:rPr>
               <a:t>Bring your recipe card next week.</a:t>
             </a:r>
@@ -10055,7 +9527,7 @@
                 <a:solidFill>
                   <a:srgbClr val="5F6B64"/>
                 </a:solidFill>
-                <a:latin typeface="Karla"/>
+                <a:latin typeface="Calibri"/>
               </a:rPr>
               <a:t>Every card that hits all four goes into the class collection, and you all get a copy.</a:t>
             </a:r>
@@ -10097,7 +9569,7 @@
                 <a:solidFill>
                   <a:srgbClr val="98A29B"/>
                 </a:solidFill>
-                <a:latin typeface="Karla"/>
+                <a:latin typeface="Calibri"/>
               </a:rPr>
               <a:t>Fuel and Focus  ·  Lesson 2 of 3</a:t>
             </a:r>
@@ -10163,7 +9635,7 @@
                 <a:solidFill>
                   <a:srgbClr val="98A29B"/>
                 </a:solidFill>
-                <a:latin typeface="Karla"/>
+                <a:latin typeface="Calibri"/>
               </a:rPr>
               <a:t>The Pastoral Guide</a:t>
             </a:r>
@@ -10205,7 +9677,7 @@
                 <a:solidFill>
                   <a:srgbClr val="98A29B"/>
                 </a:solidFill>
-                <a:latin typeface="Karla"/>
+                <a:latin typeface="Calibri"/>
               </a:rPr>
               <a:t>17 / 17</a:t>
             </a:r>
@@ -10355,7 +9827,7 @@
                 <a:solidFill>
                   <a:srgbClr val="256B4A"/>
                 </a:solidFill>
-                <a:latin typeface="Karla"/>
+                <a:latin typeface="Calibri"/>
               </a:rPr>
               <a:t>TEACHER SLIDE  ·  SKIP IT</a:t>
             </a:r>
@@ -10397,7 +9869,7 @@
                 <a:solidFill>
                   <a:srgbClr val="256B4A"/>
                 </a:solidFill>
-                <a:latin typeface="Karla"/>
+                <a:latin typeface="Calibri"/>
               </a:rPr>
               <a:t>BEFORE THEY COME IN</a:t>
             </a:r>
@@ -10435,11 +9907,11 @@
               </a:spcAft>
             </a:pPr>
             <a:r>
-              <a:rPr sz="2900" b="1" i="0">
+              <a:rPr sz="2900" b="0" i="0">
                 <a:solidFill>
                   <a:srgbClr val="2C3A33"/>
                 </a:solidFill>
-                <a:latin typeface="Libre Caslon Display"/>
+                <a:latin typeface="Georgia"/>
               </a:rPr>
               <a:t>It is all on the tables</a:t>
             </a:r>
@@ -10569,11 +10041,11 @@
               </a:spcAft>
             </a:pPr>
             <a:r>
-              <a:rPr sz="1200" b="1" i="0">
+              <a:rPr sz="1200" b="0" i="0">
                 <a:solidFill>
                   <a:srgbClr val="FFFDF7"/>
                 </a:solidFill>
-                <a:latin typeface="Libre Caslon Display"/>
+                <a:latin typeface="Georgia"/>
               </a:rPr>
               <a:t>1</a:t>
             </a:r>
@@ -10611,11 +10083,11 @@
               </a:spcAft>
             </a:pPr>
             <a:r>
-              <a:rPr sz="1300" b="1" i="0">
+              <a:rPr sz="1300" b="0" i="0">
                 <a:solidFill>
                   <a:srgbClr val="256B4A"/>
                 </a:solidFill>
-                <a:latin typeface="Libre Caslon Display"/>
+                <a:latin typeface="Georgia"/>
               </a:rPr>
               <a:t>Ingredients out</a:t>
             </a:r>
@@ -10657,7 +10129,7 @@
                 <a:solidFill>
                   <a:srgbClr val="5F6B64"/>
                 </a:solidFill>
-                <a:latin typeface="Karla"/>
+                <a:latin typeface="Calibri"/>
               </a:rPr>
               <a:t>Portioned per pair before the bell. Shopping list, page 5.</a:t>
             </a:r>
@@ -10787,11 +10259,11 @@
               </a:spcAft>
             </a:pPr>
             <a:r>
-              <a:rPr sz="1200" b="1" i="0">
+              <a:rPr sz="1200" b="0" i="0">
                 <a:solidFill>
                   <a:srgbClr val="FFFDF7"/>
                 </a:solidFill>
-                <a:latin typeface="Libre Caslon Display"/>
+                <a:latin typeface="Georgia"/>
               </a:rPr>
               <a:t>2</a:t>
             </a:r>
@@ -10829,11 +10301,11 @@
               </a:spcAft>
             </a:pPr>
             <a:r>
-              <a:rPr sz="1300" b="1" i="0">
+              <a:rPr sz="1300" b="0" i="0">
                 <a:solidFill>
                   <a:srgbClr val="256B4A"/>
                 </a:solidFill>
-                <a:latin typeface="Libre Caslon Display"/>
+                <a:latin typeface="Georgia"/>
               </a:rPr>
               <a:t>Allergies checked</a:t>
             </a:r>
@@ -10875,7 +10347,7 @@
                 <a:solidFill>
                   <a:srgbClr val="5F6B64"/>
                 </a:solidFill>
-                <a:latin typeface="Karla"/>
+                <a:latin typeface="Calibri"/>
               </a:rPr>
               <a:t>Against your own list, not what students remember today.</a:t>
             </a:r>
@@ -11005,11 +10477,11 @@
               </a:spcAft>
             </a:pPr>
             <a:r>
-              <a:rPr sz="1200" b="1" i="0">
+              <a:rPr sz="1200" b="0" i="0">
                 <a:solidFill>
                   <a:srgbClr val="FFFDF7"/>
                 </a:solidFill>
-                <a:latin typeface="Libre Caslon Display"/>
+                <a:latin typeface="Georgia"/>
               </a:rPr>
               <a:t>3</a:t>
             </a:r>
@@ -11047,11 +10519,11 @@
               </a:spcAft>
             </a:pPr>
             <a:r>
-              <a:rPr sz="1300" b="1" i="0">
+              <a:rPr sz="1300" b="0" i="0">
                 <a:solidFill>
                   <a:srgbClr val="256B4A"/>
                 </a:solidFill>
-                <a:latin typeface="Libre Caslon Display"/>
+                <a:latin typeface="Georgia"/>
               </a:rPr>
               <a:t>One method slide</a:t>
             </a:r>
@@ -11093,7 +10565,7 @@
                 <a:solidFill>
                   <a:srgbClr val="5F6B64"/>
                 </a:solidFill>
-                <a:latin typeface="Karla"/>
+                <a:latin typeface="Calibri"/>
               </a:rPr>
               <a:t>Show only the snack you bought for. Skip the other two.</a:t>
             </a:r>
@@ -11223,11 +10695,11 @@
               </a:spcAft>
             </a:pPr>
             <a:r>
-              <a:rPr sz="1200" b="1" i="0">
+              <a:rPr sz="1200" b="0" i="0">
                 <a:solidFill>
                   <a:srgbClr val="FFFDF7"/>
                 </a:solidFill>
-                <a:latin typeface="Libre Caslon Display"/>
+                <a:latin typeface="Georgia"/>
               </a:rPr>
               <a:t>4</a:t>
             </a:r>
@@ -11265,11 +10737,11 @@
               </a:spcAft>
             </a:pPr>
             <a:r>
-              <a:rPr sz="1300" b="1" i="0">
+              <a:rPr sz="1300" b="0" i="0">
                 <a:solidFill>
                   <a:srgbClr val="256B4A"/>
                 </a:solidFill>
-                <a:latin typeface="Libre Caslon Display"/>
+                <a:latin typeface="Georgia"/>
               </a:rPr>
               <a:t>Bin bag and cloths</a:t>
             </a:r>
@@ -11311,7 +10783,7 @@
                 <a:solidFill>
                   <a:srgbClr val="5F6B64"/>
                 </a:solidFill>
-                <a:latin typeface="Karla"/>
+                <a:latin typeface="Calibri"/>
               </a:rPr>
               <a:t>Clearing up takes three minutes, so build it in.</a:t>
             </a:r>
@@ -11353,7 +10825,7 @@
                 <a:solidFill>
                   <a:srgbClr val="256B4A"/>
                 </a:solidFill>
-                <a:latin typeface="Karla"/>
+                <a:latin typeface="Calibri"/>
               </a:rPr>
               <a:t>No heat, no sharp knives and no nuts in any of the three.</a:t>
             </a:r>
@@ -11419,7 +10891,7 @@
                 <a:solidFill>
                   <a:srgbClr val="98A29B"/>
                 </a:solidFill>
-                <a:latin typeface="Karla"/>
+                <a:latin typeface="Calibri"/>
               </a:rPr>
               <a:t>The Pastoral Guide</a:t>
             </a:r>
@@ -11461,7 +10933,7 @@
                 <a:solidFill>
                   <a:srgbClr val="98A29B"/>
                 </a:solidFill>
-                <a:latin typeface="Karla"/>
+                <a:latin typeface="Calibri"/>
               </a:rPr>
               <a:t>2 / 17</a:t>
             </a:r>
@@ -11565,97 +11037,9 @@
                 <a:solidFill>
                   <a:srgbClr val="CBDFD6"/>
                 </a:solidFill>
-                <a:latin typeface="Karla"/>
+                <a:latin typeface="Calibri"/>
               </a:rPr>
               <a:t>FROM LAST WEEK</a:t>
-            </a:r>
-          </a:p>
-        </p:txBody>
-      </p:sp>
-      <p:sp>
-        <p:nvSpPr>
-          <p:cNvPr id="4" name="Rounded Rectangle 3"/>
-          <p:cNvSpPr/>
-          <p:nvPr/>
-        </p:nvSpPr>
-        <p:spPr>
-          <a:xfrm>
-            <a:off x="7086600" y="530352"/>
-            <a:ext cx="1371600" cy="347472"/>
-          </a:xfrm>
-          <a:prstGeom prst="roundRect">
-            <a:avLst>
-              <a:gd name="adj" fmla="val 50000"/>
-            </a:avLst>
-          </a:prstGeom>
-          <a:solidFill>
-            <a:srgbClr val="FFFDF7"/>
-          </a:solidFill>
-          <a:ln>
-            <a:noFill/>
-          </a:ln>
-          <a:effectLst/>
-        </p:spPr>
-        <p:style>
-          <a:lnRef idx="1">
-            <a:schemeClr val="accent1"/>
-          </a:lnRef>
-          <a:fillRef idx="3">
-            <a:schemeClr val="accent1"/>
-          </a:fillRef>
-          <a:effectRef idx="2">
-            <a:schemeClr val="accent1"/>
-          </a:effectRef>
-          <a:fontRef idx="minor">
-            <a:schemeClr val="lt1"/>
-          </a:fontRef>
-        </p:style>
-        <p:txBody>
-          <a:bodyPr rtlCol="0" anchor="ctr"/>
-          <a:lstStyle/>
-          <a:p>
-            <a:pPr algn="ctr"/>
-          </a:p>
-        </p:txBody>
-      </p:sp>
-      <p:sp>
-        <p:nvSpPr>
-          <p:cNvPr id="5" name="TextBox 4"/>
-          <p:cNvSpPr txBox="1"/>
-          <p:nvPr/>
-        </p:nvSpPr>
-        <p:spPr>
-          <a:xfrm>
-            <a:off x="7086600" y="589788"/>
-            <a:ext cx="1371600" cy="237744"/>
-          </a:xfrm>
-          <a:prstGeom prst="rect">
-            <a:avLst/>
-          </a:prstGeom>
-          <a:noFill/>
-        </p:spPr>
-        <p:txBody>
-          <a:bodyPr wrap="square" lIns="0" rIns="0" tIns="0" bIns="0" anchor="t">
-            <a:spAutoFit/>
-          </a:bodyPr>
-          <a:lstStyle/>
-          <a:p>
-            <a:pPr algn="ctr">
-              <a:lnSpc>
-                <a:spcPct val="125000"/>
-              </a:lnSpc>
-              <a:spcAft>
-                <a:spcPts val="0"/>
-              </a:spcAft>
-            </a:pPr>
-            <a:r>
-              <a:rPr sz="1000" b="1" i="0" spc="100">
-                <a:solidFill>
-                  <a:srgbClr val="256B4A"/>
-                </a:solidFill>
-                <a:latin typeface="Karla"/>
-              </a:rPr>
-              <a:t>RECAP</a:t>
             </a:r>
           </a:p>
         </p:txBody>
@@ -11691,11 +11075,11 @@
               </a:spcAft>
             </a:pPr>
             <a:r>
-              <a:rPr sz="3300" b="1" i="0">
+              <a:rPr sz="3300" b="0" i="0">
                 <a:solidFill>
                   <a:srgbClr val="FFFDF7"/>
                 </a:solidFill>
-                <a:latin typeface="Libre Caslon Display"/>
+                <a:latin typeface="Georgia"/>
               </a:rPr>
               <a:t>Your four criteria</a:t>
             </a:r>
@@ -11825,11 +11209,11 @@
               </a:spcAft>
             </a:pPr>
             <a:r>
-              <a:rPr sz="1300" b="1" i="0">
+              <a:rPr sz="1300" b="0" i="0">
                 <a:solidFill>
                   <a:srgbClr val="FFFDF7"/>
                 </a:solidFill>
-                <a:latin typeface="Libre Caslon Display"/>
+                <a:latin typeface="Georgia"/>
               </a:rPr>
               <a:t>1</a:t>
             </a:r>
@@ -11867,11 +11251,11 @@
               </a:spcAft>
             </a:pPr>
             <a:r>
-              <a:rPr sz="1500" b="1" i="0">
+              <a:rPr sz="1500" b="0" i="0">
                 <a:solidFill>
                   <a:srgbClr val="256B4A"/>
                 </a:solidFill>
-                <a:latin typeface="Libre Caslon Display"/>
+                <a:latin typeface="Georgia"/>
               </a:rPr>
               <a:t>Protein</a:t>
             </a:r>
@@ -11913,7 +11297,7 @@
                 <a:solidFill>
                   <a:srgbClr val="5F6B64"/>
                 </a:solidFill>
-                <a:latin typeface="Karla"/>
+                <a:latin typeface="Calibri"/>
               </a:rPr>
               <a:t>Slows the whole thing down, and keeps you full.</a:t>
             </a:r>
@@ -12043,11 +11427,11 @@
               </a:spcAft>
             </a:pPr>
             <a:r>
-              <a:rPr sz="1300" b="1" i="0">
+              <a:rPr sz="1300" b="0" i="0">
                 <a:solidFill>
                   <a:srgbClr val="FFFDF7"/>
                 </a:solidFill>
-                <a:latin typeface="Libre Caslon Display"/>
+                <a:latin typeface="Georgia"/>
               </a:rPr>
               <a:t>2</a:t>
             </a:r>
@@ -12085,11 +11469,11 @@
               </a:spcAft>
             </a:pPr>
             <a:r>
-              <a:rPr sz="1500" b="1" i="0">
+              <a:rPr sz="1500" b="0" i="0">
                 <a:solidFill>
                   <a:srgbClr val="256B4A"/>
                 </a:solidFill>
-                <a:latin typeface="Libre Caslon Display"/>
+                <a:latin typeface="Georgia"/>
               </a:rPr>
               <a:t>Fibre</a:t>
             </a:r>
@@ -12131,7 +11515,7 @@
                 <a:solidFill>
                   <a:srgbClr val="5F6B64"/>
                 </a:solidFill>
-                <a:latin typeface="Karla"/>
+                <a:latin typeface="Calibri"/>
               </a:rPr>
               <a:t>Slows the food down in your gut, so the glucose arrives gradually.</a:t>
             </a:r>
@@ -12261,11 +11645,11 @@
               </a:spcAft>
             </a:pPr>
             <a:r>
-              <a:rPr sz="1300" b="1" i="0">
+              <a:rPr sz="1300" b="0" i="0">
                 <a:solidFill>
                   <a:srgbClr val="FFFDF7"/>
                 </a:solidFill>
-                <a:latin typeface="Libre Caslon Display"/>
+                <a:latin typeface="Georgia"/>
               </a:rPr>
               <a:t>3</a:t>
             </a:r>
@@ -12303,11 +11687,11 @@
               </a:spcAft>
             </a:pPr>
             <a:r>
-              <a:rPr sz="1500" b="1" i="0">
+              <a:rPr sz="1500" b="0" i="0">
                 <a:solidFill>
                   <a:srgbClr val="256B4A"/>
                 </a:solidFill>
-                <a:latin typeface="Libre Caslon Display"/>
+                <a:latin typeface="Georgia"/>
               </a:rPr>
               <a:t>A slow carb</a:t>
             </a:r>
@@ -12349,7 +11733,7 @@
                 <a:solidFill>
                   <a:srgbClr val="5F6B64"/>
                 </a:solidFill>
-                <a:latin typeface="Karla"/>
+                <a:latin typeface="Calibri"/>
               </a:rPr>
               <a:t>Oats, wholegrain or whole fruit. Not white and not sugary.</a:t>
             </a:r>
@@ -12479,11 +11863,11 @@
               </a:spcAft>
             </a:pPr>
             <a:r>
-              <a:rPr sz="1300" b="1" i="0">
+              <a:rPr sz="1300" b="0" i="0">
                 <a:solidFill>
                   <a:srgbClr val="FFFDF7"/>
                 </a:solidFill>
-                <a:latin typeface="Libre Caslon Display"/>
+                <a:latin typeface="Georgia"/>
               </a:rPr>
               <a:t>4</a:t>
             </a:r>
@@ -12521,11 +11905,11 @@
               </a:spcAft>
             </a:pPr>
             <a:r>
-              <a:rPr sz="1500" b="1" i="0">
+              <a:rPr sz="1500" b="0" i="0">
                 <a:solidFill>
                   <a:srgbClr val="256B4A"/>
                 </a:solidFill>
-                <a:latin typeface="Libre Caslon Display"/>
+                <a:latin typeface="Georgia"/>
               </a:rPr>
               <a:t>Healthy fats</a:t>
             </a:r>
@@ -12567,7 +11951,7 @@
                 <a:solidFill>
                   <a:srgbClr val="5F6B64"/>
                 </a:solidFill>
-                <a:latin typeface="Karla"/>
+                <a:latin typeface="Calibri"/>
               </a:rPr>
               <a:t>Slows the stomach down, and carries the most energy per gram. Seeds, nuts, avocado.</a:t>
             </a:r>
@@ -12609,7 +11993,7 @@
                 <a:solidFill>
                   <a:srgbClr val="FFFDF7"/>
                 </a:solidFill>
-                <a:latin typeface="Karla"/>
+                <a:latin typeface="Calibri"/>
               </a:rPr>
               <a:t>You will check what you make against all four before you eat any of it.</a:t>
             </a:r>
@@ -12675,7 +12059,7 @@
                 <a:solidFill>
                   <a:srgbClr val="CBDFD6"/>
                 </a:solidFill>
-                <a:latin typeface="Karla"/>
+                <a:latin typeface="Calibri"/>
               </a:rPr>
               <a:t>The Pastoral Guide</a:t>
             </a:r>
@@ -12717,7 +12101,7 @@
                 <a:solidFill>
                   <a:srgbClr val="CBDFD6"/>
                 </a:solidFill>
-                <a:latin typeface="Karla"/>
+                <a:latin typeface="Calibri"/>
               </a:rPr>
               <a:t>3 / 17</a:t>
             </a:r>
@@ -12821,7 +12205,7 @@
                 <a:solidFill>
                   <a:srgbClr val="256B4A"/>
                 </a:solidFill>
-                <a:latin typeface="Karla"/>
+                <a:latin typeface="Calibri"/>
               </a:rPr>
               <a:t>NOT OPTIONAL, NOT NEGOTIABLE</a:t>
             </a:r>
@@ -12909,7 +12293,7 @@
                 <a:solidFill>
                   <a:srgbClr val="256B4A"/>
                 </a:solidFill>
-                <a:latin typeface="Karla"/>
+                <a:latin typeface="Calibri"/>
               </a:rPr>
               <a:t>HYGIENE</a:t>
             </a:r>
@@ -12947,11 +12331,11 @@
               </a:spcAft>
             </a:pPr>
             <a:r>
-              <a:rPr sz="2800" b="1" i="0">
+              <a:rPr sz="2800" b="0" i="0">
                 <a:solidFill>
                   <a:srgbClr val="2C3A33"/>
                 </a:solidFill>
-                <a:latin typeface="Libre Caslon Display"/>
+                <a:latin typeface="Georgia"/>
               </a:rPr>
               <a:t>Before anybody touches food</a:t>
             </a:r>
@@ -13041,7 +12425,7 @@
                 <a:solidFill>
                   <a:srgbClr val="2C3A33"/>
                 </a:solidFill>
-                <a:latin typeface="Karla"/>
+                <a:latin typeface="Calibri"/>
               </a:rPr>
               <a:t>Wash your hands. Properly, with soap, for twenty seconds.</a:t>
             </a:r>
@@ -13131,7 +12515,7 @@
                 <a:solidFill>
                   <a:srgbClr val="2C3A33"/>
                 </a:solidFill>
-                <a:latin typeface="Karla"/>
+                <a:latin typeface="Calibri"/>
               </a:rPr>
               <a:t>Tie your hair back and roll your sleeves up.</a:t>
             </a:r>
@@ -13221,7 +12605,7 @@
                 <a:solidFill>
                   <a:srgbClr val="2C3A33"/>
                 </a:solidFill>
-                <a:latin typeface="Karla"/>
+                <a:latin typeface="Calibri"/>
               </a:rPr>
               <a:t>Wipe your table down before anything is unwrapped.</a:t>
             </a:r>
@@ -13311,7 +12695,7 @@
                 <a:solidFill>
                   <a:srgbClr val="2C3A33"/>
                 </a:solidFill>
-                <a:latin typeface="Karla"/>
+                <a:latin typeface="Calibri"/>
               </a:rPr>
               <a:t>You touch your own food only. Nobody reaches into anybody else’s.</a:t>
             </a:r>
@@ -13401,7 +12785,7 @@
                 <a:solidFill>
                   <a:srgbClr val="2C3A33"/>
                 </a:solidFill>
-                <a:latin typeface="Karla"/>
+                <a:latin typeface="Calibri"/>
               </a:rPr>
               <a:t>Nothing goes in your mouth until your teacher says so.</a:t>
             </a:r>
@@ -13443,7 +12827,7 @@
                 <a:solidFill>
                   <a:srgbClr val="256B4A"/>
                 </a:solidFill>
-                <a:latin typeface="Karla"/>
+                <a:latin typeface="Calibri"/>
               </a:rPr>
               <a:t>Anyone who cannot do these five is not handling food today.</a:t>
             </a:r>
@@ -13509,7 +12893,7 @@
                 <a:solidFill>
                   <a:srgbClr val="98A29B"/>
                 </a:solidFill>
-                <a:latin typeface="Karla"/>
+                <a:latin typeface="Calibri"/>
               </a:rPr>
               <a:t>The Pastoral Guide</a:t>
             </a:r>
@@ -13551,7 +12935,7 @@
                 <a:solidFill>
                   <a:srgbClr val="98A29B"/>
                 </a:solidFill>
-                <a:latin typeface="Karla"/>
+                <a:latin typeface="Calibri"/>
               </a:rPr>
               <a:t>4 / 17</a:t>
             </a:r>
@@ -13655,7 +13039,7 @@
                 <a:solidFill>
                   <a:srgbClr val="CBDFD6"/>
                 </a:solidFill>
-                <a:latin typeface="Karla"/>
+                <a:latin typeface="Calibri"/>
               </a:rPr>
               <a:t>THIS ONE IS SERIOUS</a:t>
             </a:r>
@@ -13743,7 +13127,7 @@
                 <a:solidFill>
                   <a:srgbClr val="256B4A"/>
                 </a:solidFill>
-                <a:latin typeface="Karla"/>
+                <a:latin typeface="Calibri"/>
               </a:rPr>
               <a:t>ALLERGIES</a:t>
             </a:r>
@@ -13781,11 +13165,11 @@
               </a:spcAft>
             </a:pPr>
             <a:r>
-              <a:rPr sz="3200" b="1" i="0">
+              <a:rPr sz="3200" b="0" i="0">
                 <a:solidFill>
                   <a:srgbClr val="FFFDF7"/>
                 </a:solidFill>
-                <a:latin typeface="Libre Caslon Display"/>
+                <a:latin typeface="Georgia"/>
               </a:rPr>
               <a:t>Speak up now, not later</a:t>
             </a:r>
@@ -13875,7 +13259,7 @@
                 <a:solidFill>
                   <a:srgbClr val="256B4A"/>
                 </a:solidFill>
-                <a:latin typeface="Karla"/>
+                <a:latin typeface="Calibri"/>
               </a:rPr>
               <a:t>If you have any allergy or intolerance, tell your teacher now.</a:t>
             </a:r>
@@ -13965,7 +13349,7 @@
                 <a:solidFill>
                   <a:srgbClr val="256B4A"/>
                 </a:solidFill>
-                <a:latin typeface="Karla"/>
+                <a:latin typeface="Calibri"/>
               </a:rPr>
               <a:t>If you are not sure, tell them anyway.</a:t>
             </a:r>
@@ -14055,7 +13439,7 @@
                 <a:solidFill>
                   <a:srgbClr val="256B4A"/>
                 </a:solidFill>
-                <a:latin typeface="Karla"/>
+                <a:latin typeface="Calibri"/>
               </a:rPr>
               <a:t>Do not share, swap or taste anybody else’s. Not even a bit.</a:t>
             </a:r>
@@ -14097,7 +13481,7 @@
                 <a:solidFill>
                   <a:srgbClr val="FFFDF7"/>
                 </a:solidFill>
-                <a:latin typeface="Karla"/>
+                <a:latin typeface="Calibri"/>
               </a:rPr>
               <a:t>Nobody has to eat anything. Making it still counts.</a:t>
             </a:r>
@@ -14163,7 +13547,7 @@
                 <a:solidFill>
                   <a:srgbClr val="CBDFD6"/>
                 </a:solidFill>
-                <a:latin typeface="Karla"/>
+                <a:latin typeface="Calibri"/>
               </a:rPr>
               <a:t>The Pastoral Guide</a:t>
             </a:r>
@@ -14205,7 +13589,7 @@
                 <a:solidFill>
                   <a:srgbClr val="CBDFD6"/>
                 </a:solidFill>
-                <a:latin typeface="Karla"/>
+                <a:latin typeface="Calibri"/>
               </a:rPr>
               <a:t>5 / 17</a:t>
             </a:r>
@@ -14355,7 +13739,7 @@
                 <a:solidFill>
                   <a:srgbClr val="256B4A"/>
                 </a:solidFill>
-                <a:latin typeface="Karla"/>
+                <a:latin typeface="Calibri"/>
               </a:rPr>
               <a:t>ONLY IF YOU ARE MAKING THIS</a:t>
             </a:r>
@@ -14397,7 +13781,7 @@
                 <a:solidFill>
                   <a:srgbClr val="256B4A"/>
                 </a:solidFill>
-                <a:latin typeface="Karla"/>
+                <a:latin typeface="Calibri"/>
               </a:rPr>
               <a:t>METHOD 1 OF 3</a:t>
             </a:r>
@@ -14435,11 +13819,11 @@
               </a:spcAft>
             </a:pPr>
             <a:r>
-              <a:rPr sz="3000" b="1" i="0">
+              <a:rPr sz="3000" b="0" i="0">
                 <a:solidFill>
                   <a:srgbClr val="2C3A33"/>
                 </a:solidFill>
-                <a:latin typeface="Libre Caslon Display"/>
+                <a:latin typeface="Georgia"/>
               </a:rPr>
               <a:t>Pinwheel wraps</a:t>
             </a:r>
@@ -14569,11 +13953,11 @@
               </a:spcAft>
             </a:pPr>
             <a:r>
-              <a:rPr sz="1150" b="1" i="0">
+              <a:rPr sz="1150" b="0" i="0">
                 <a:solidFill>
                   <a:srgbClr val="FFFDF7"/>
                 </a:solidFill>
-                <a:latin typeface="Libre Caslon Display"/>
+                <a:latin typeface="Georgia"/>
               </a:rPr>
               <a:t>1</a:t>
             </a:r>
@@ -14615,7 +13999,7 @@
                 <a:solidFill>
                   <a:srgbClr val="2C3A33"/>
                 </a:solidFill>
-                <a:latin typeface="Karla"/>
+                <a:latin typeface="Calibri"/>
               </a:rPr>
               <a:t>Spread the soft cheese right to the edges of the wrap.</a:t>
             </a:r>
@@ -14745,11 +14129,11 @@
               </a:spcAft>
             </a:pPr>
             <a:r>
-              <a:rPr sz="1150" b="1" i="0">
+              <a:rPr sz="1150" b="0" i="0">
                 <a:solidFill>
                   <a:srgbClr val="FFFDF7"/>
                 </a:solidFill>
-                <a:latin typeface="Libre Caslon Display"/>
+                <a:latin typeface="Georgia"/>
               </a:rPr>
               <a:t>2</a:t>
             </a:r>
@@ -14791,7 +14175,7 @@
                 <a:solidFill>
                   <a:srgbClr val="2C3A33"/>
                 </a:solidFill>
-                <a:latin typeface="Karla"/>
+                <a:latin typeface="Calibri"/>
               </a:rPr>
               <a:t>Spread the mashed avocado over the top of it.</a:t>
             </a:r>
@@ -14921,11 +14305,11 @@
               </a:spcAft>
             </a:pPr>
             <a:r>
-              <a:rPr sz="1150" b="1" i="0">
+              <a:rPr sz="1150" b="0" i="0">
                 <a:solidFill>
                   <a:srgbClr val="FFFDF7"/>
                 </a:solidFill>
-                <a:latin typeface="Libre Caslon Display"/>
+                <a:latin typeface="Georgia"/>
               </a:rPr>
               <a:t>3</a:t>
             </a:r>
@@ -14967,7 +14351,7 @@
                 <a:solidFill>
                   <a:srgbClr val="2C3A33"/>
                 </a:solidFill>
-                <a:latin typeface="Karla"/>
+                <a:latin typeface="Calibri"/>
               </a:rPr>
               <a:t>Scatter the grated carrot and pepper across the middle.</a:t>
             </a:r>
@@ -15097,11 +14481,11 @@
               </a:spcAft>
             </a:pPr>
             <a:r>
-              <a:rPr sz="1150" b="1" i="0">
+              <a:rPr sz="1150" b="0" i="0">
                 <a:solidFill>
                   <a:srgbClr val="FFFDF7"/>
                 </a:solidFill>
-                <a:latin typeface="Libre Caslon Display"/>
+                <a:latin typeface="Georgia"/>
               </a:rPr>
               <a:t>4</a:t>
             </a:r>
@@ -15143,7 +14527,7 @@
                 <a:solidFill>
                   <a:srgbClr val="2C3A33"/>
                 </a:solidFill>
-                <a:latin typeface="Karla"/>
+                <a:latin typeface="Calibri"/>
               </a:rPr>
               <a:t>Roll it up tight from the edge nearest you, then slice it into six rounds.</a:t>
             </a:r>
@@ -15273,11 +14657,11 @@
               </a:spcAft>
             </a:pPr>
             <a:r>
-              <a:rPr sz="1150" b="1" i="0">
+              <a:rPr sz="1150" b="0" i="0">
                 <a:solidFill>
                   <a:srgbClr val="FFFDF7"/>
                 </a:solidFill>
-                <a:latin typeface="Libre Caslon Display"/>
+                <a:latin typeface="Georgia"/>
               </a:rPr>
               <a:t>5</a:t>
             </a:r>
@@ -15319,7 +14703,7 @@
                 <a:solidFill>
                   <a:srgbClr val="2C3A33"/>
                 </a:solidFill>
-                <a:latin typeface="Karla"/>
+                <a:latin typeface="Calibri"/>
               </a:rPr>
               <a:t>Check it against your four criteria before you eat it.</a:t>
             </a:r>
@@ -15361,7 +14745,7 @@
                 <a:solidFill>
                   <a:srgbClr val="256B4A"/>
                 </a:solidFill>
-                <a:latin typeface="Karla"/>
+                <a:latin typeface="Calibri"/>
               </a:rPr>
               <a:t>In pairs. The card on your table has the swaps if you need a different version.</a:t>
             </a:r>
@@ -15427,7 +14811,7 @@
                 <a:solidFill>
                   <a:srgbClr val="98A29B"/>
                 </a:solidFill>
-                <a:latin typeface="Karla"/>
+                <a:latin typeface="Calibri"/>
               </a:rPr>
               <a:t>The Pastoral Guide</a:t>
             </a:r>
@@ -15469,7 +14853,7 @@
                 <a:solidFill>
                   <a:srgbClr val="98A29B"/>
                 </a:solidFill>
-                <a:latin typeface="Karla"/>
+                <a:latin typeface="Calibri"/>
               </a:rPr>
               <a:t>6 / 17</a:t>
             </a:r>
@@ -15619,7 +15003,7 @@
                 <a:solidFill>
                   <a:srgbClr val="256B4A"/>
                 </a:solidFill>
-                <a:latin typeface="Karla"/>
+                <a:latin typeface="Calibri"/>
               </a:rPr>
               <a:t>ONLY IF YOU ARE MAKING THIS</a:t>
             </a:r>
@@ -15661,7 +15045,7 @@
                 <a:solidFill>
                   <a:srgbClr val="256B4A"/>
                 </a:solidFill>
-                <a:latin typeface="Karla"/>
+                <a:latin typeface="Calibri"/>
               </a:rPr>
               <a:t>METHOD 2 OF 3</a:t>
             </a:r>
@@ -15699,11 +15083,11 @@
               </a:spcAft>
             </a:pPr>
             <a:r>
-              <a:rPr sz="3000" b="1" i="0">
+              <a:rPr sz="3000" b="0" i="0">
                 <a:solidFill>
                   <a:srgbClr val="2C3A33"/>
                 </a:solidFill>
-                <a:latin typeface="Libre Caslon Display"/>
+                <a:latin typeface="Georgia"/>
               </a:rPr>
               <a:t>Oat and seed balls</a:t>
             </a:r>
@@ -15833,11 +15217,11 @@
               </a:spcAft>
             </a:pPr>
             <a:r>
-              <a:rPr sz="1150" b="1" i="0">
+              <a:rPr sz="1150" b="0" i="0">
                 <a:solidFill>
                   <a:srgbClr val="FFFDF7"/>
                 </a:solidFill>
-                <a:latin typeface="Libre Caslon Display"/>
+                <a:latin typeface="Georgia"/>
               </a:rPr>
               <a:t>1</a:t>
             </a:r>
@@ -15879,7 +15263,7 @@
                 <a:solidFill>
                   <a:srgbClr val="2C3A33"/>
                 </a:solidFill>
-                <a:latin typeface="Karla"/>
+                <a:latin typeface="Calibri"/>
               </a:rPr>
               <a:t>Mash the banana in the bowl until there are no lumps.</a:t>
             </a:r>
@@ -16009,11 +15393,11 @@
               </a:spcAft>
             </a:pPr>
             <a:r>
-              <a:rPr sz="1150" b="1" i="0">
+              <a:rPr sz="1150" b="0" i="0">
                 <a:solidFill>
                   <a:srgbClr val="FFFDF7"/>
                 </a:solidFill>
-                <a:latin typeface="Libre Caslon Display"/>
+                <a:latin typeface="Georgia"/>
               </a:rPr>
               <a:t>2</a:t>
             </a:r>
@@ -16055,7 +15439,7 @@
                 <a:solidFill>
                   <a:srgbClr val="2C3A33"/>
                 </a:solidFill>
-                <a:latin typeface="Karla"/>
+                <a:latin typeface="Calibri"/>
               </a:rPr>
               <a:t>Stir in the oats, the seeds and the cocoa.</a:t>
             </a:r>
@@ -16185,11 +15569,11 @@
               </a:spcAft>
             </a:pPr>
             <a:r>
-              <a:rPr sz="1150" b="1" i="0">
+              <a:rPr sz="1150" b="0" i="0">
                 <a:solidFill>
                   <a:srgbClr val="FFFDF7"/>
                 </a:solidFill>
-                <a:latin typeface="Libre Caslon Display"/>
+                <a:latin typeface="Georgia"/>
               </a:rPr>
               <a:t>3</a:t>
             </a:r>
@@ -16231,7 +15615,7 @@
                 <a:solidFill>
                   <a:srgbClr val="2C3A33"/>
                 </a:solidFill>
-                <a:latin typeface="Karla"/>
+                <a:latin typeface="Calibri"/>
               </a:rPr>
               <a:t>Squeeze the mix into balls about the size of a walnut.</a:t>
             </a:r>
@@ -16361,11 +15745,11 @@
               </a:spcAft>
             </a:pPr>
             <a:r>
-              <a:rPr sz="1150" b="1" i="0">
+              <a:rPr sz="1150" b="0" i="0">
                 <a:solidFill>
                   <a:srgbClr val="FFFDF7"/>
                 </a:solidFill>
-                <a:latin typeface="Libre Caslon Display"/>
+                <a:latin typeface="Georgia"/>
               </a:rPr>
               <a:t>4</a:t>
             </a:r>
@@ -16407,7 +15791,7 @@
                 <a:solidFill>
                   <a:srgbClr val="2C3A33"/>
                 </a:solidFill>
-                <a:latin typeface="Karla"/>
+                <a:latin typeface="Calibri"/>
               </a:rPr>
               <a:t>Put them on the tray to firm up.</a:t>
             </a:r>
@@ -16537,11 +15921,11 @@
               </a:spcAft>
             </a:pPr>
             <a:r>
-              <a:rPr sz="1150" b="1" i="0">
+              <a:rPr sz="1150" b="0" i="0">
                 <a:solidFill>
                   <a:srgbClr val="FFFDF7"/>
                 </a:solidFill>
-                <a:latin typeface="Libre Caslon Display"/>
+                <a:latin typeface="Georgia"/>
               </a:rPr>
               <a:t>5</a:t>
             </a:r>
@@ -16583,7 +15967,7 @@
                 <a:solidFill>
                   <a:srgbClr val="2C3A33"/>
                 </a:solidFill>
-                <a:latin typeface="Karla"/>
+                <a:latin typeface="Calibri"/>
               </a:rPr>
               <a:t>Check them against your four criteria while they chill.</a:t>
             </a:r>
@@ -16625,7 +16009,7 @@
                 <a:solidFill>
                   <a:srgbClr val="256B4A"/>
                 </a:solidFill>
-                <a:latin typeface="Karla"/>
+                <a:latin typeface="Calibri"/>
               </a:rPr>
               <a:t>In pairs. The card on your table has the swaps if you need a different version.</a:t>
             </a:r>
@@ -16691,7 +16075,7 @@
                 <a:solidFill>
                   <a:srgbClr val="98A29B"/>
                 </a:solidFill>
-                <a:latin typeface="Karla"/>
+                <a:latin typeface="Calibri"/>
               </a:rPr>
               <a:t>The Pastoral Guide</a:t>
             </a:r>
@@ -16733,7 +16117,7 @@
                 <a:solidFill>
                   <a:srgbClr val="98A29B"/>
                 </a:solidFill>
-                <a:latin typeface="Karla"/>
+                <a:latin typeface="Calibri"/>
               </a:rPr>
               <a:t>7 / 17</a:t>
             </a:r>
@@ -16883,7 +16267,7 @@
                 <a:solidFill>
                   <a:srgbClr val="256B4A"/>
                 </a:solidFill>
-                <a:latin typeface="Karla"/>
+                <a:latin typeface="Calibri"/>
               </a:rPr>
               <a:t>ONLY IF YOU ARE MAKING THIS</a:t>
             </a:r>
@@ -16925,7 +16309,7 @@
                 <a:solidFill>
                   <a:srgbClr val="256B4A"/>
                 </a:solidFill>
-                <a:latin typeface="Karla"/>
+                <a:latin typeface="Calibri"/>
               </a:rPr>
               <a:t>METHOD 3 OF 3</a:t>
             </a:r>
@@ -16963,11 +16347,11 @@
               </a:spcAft>
             </a:pPr>
             <a:r>
-              <a:rPr sz="3000" b="1" i="0">
+              <a:rPr sz="3000" b="0" i="0">
                 <a:solidFill>
                   <a:srgbClr val="2C3A33"/>
                 </a:solidFill>
-                <a:latin typeface="Libre Caslon Display"/>
+                <a:latin typeface="Georgia"/>
               </a:rPr>
               <a:t>Fruit and yoghurt pots</a:t>
             </a:r>
@@ -17097,11 +16481,11 @@
               </a:spcAft>
             </a:pPr>
             <a:r>
-              <a:rPr sz="1150" b="1" i="0">
+              <a:rPr sz="1150" b="0" i="0">
                 <a:solidFill>
                   <a:srgbClr val="FFFDF7"/>
                 </a:solidFill>
-                <a:latin typeface="Libre Caslon Display"/>
+                <a:latin typeface="Georgia"/>
               </a:rPr>
               <a:t>1</a:t>
             </a:r>
@@ -17143,7 +16527,7 @@
                 <a:solidFill>
                   <a:srgbClr val="2C3A33"/>
                 </a:solidFill>
-                <a:latin typeface="Karla"/>
+                <a:latin typeface="Calibri"/>
               </a:rPr>
               <a:t>Oats in the bottom of the cup, about two spoonfuls.</a:t>
             </a:r>
@@ -17273,11 +16657,11 @@
               </a:spcAft>
             </a:pPr>
             <a:r>
-              <a:rPr sz="1150" b="1" i="0">
+              <a:rPr sz="1150" b="0" i="0">
                 <a:solidFill>
                   <a:srgbClr val="FFFDF7"/>
                 </a:solidFill>
-                <a:latin typeface="Libre Caslon Display"/>
+                <a:latin typeface="Georgia"/>
               </a:rPr>
               <a:t>2</a:t>
             </a:r>
@@ -17319,7 +16703,7 @@
                 <a:solidFill>
                   <a:srgbClr val="2C3A33"/>
                 </a:solidFill>
-                <a:latin typeface="Karla"/>
+                <a:latin typeface="Calibri"/>
               </a:rPr>
               <a:t>Yoghurt over the oats, enough to cover them.</a:t>
             </a:r>
@@ -17449,11 +16833,11 @@
               </a:spcAft>
             </a:pPr>
             <a:r>
-              <a:rPr sz="1150" b="1" i="0">
+              <a:rPr sz="1150" b="0" i="0">
                 <a:solidFill>
                   <a:srgbClr val="FFFDF7"/>
                 </a:solidFill>
-                <a:latin typeface="Libre Caslon Display"/>
+                <a:latin typeface="Georgia"/>
               </a:rPr>
               <a:t>3</a:t>
             </a:r>
@@ -17495,7 +16879,7 @@
                 <a:solidFill>
                   <a:srgbClr val="2C3A33"/>
                 </a:solidFill>
-                <a:latin typeface="Karla"/>
+                <a:latin typeface="Calibri"/>
               </a:rPr>
               <a:t>Chopped fruit on top of that.</a:t>
             </a:r>
@@ -17625,11 +17009,11 @@
               </a:spcAft>
             </a:pPr>
             <a:r>
-              <a:rPr sz="1150" b="1" i="0">
+              <a:rPr sz="1150" b="0" i="0">
                 <a:solidFill>
                   <a:srgbClr val="FFFDF7"/>
                 </a:solidFill>
-                <a:latin typeface="Libre Caslon Display"/>
+                <a:latin typeface="Georgia"/>
               </a:rPr>
               <a:t>4</a:t>
             </a:r>
@@ -17671,7 +17055,7 @@
                 <a:solidFill>
                   <a:srgbClr val="2C3A33"/>
                 </a:solidFill>
-                <a:latin typeface="Karla"/>
+                <a:latin typeface="Calibri"/>
               </a:rPr>
               <a:t>Seeds last, one teaspoon, right across the top.</a:t>
             </a:r>
@@ -17801,11 +17185,11 @@
               </a:spcAft>
             </a:pPr>
             <a:r>
-              <a:rPr sz="1150" b="1" i="0">
+              <a:rPr sz="1150" b="0" i="0">
                 <a:solidFill>
                   <a:srgbClr val="FFFDF7"/>
                 </a:solidFill>
-                <a:latin typeface="Libre Caslon Display"/>
+                <a:latin typeface="Georgia"/>
               </a:rPr>
               <a:t>5</a:t>
             </a:r>
@@ -17847,7 +17231,7 @@
                 <a:solidFill>
                   <a:srgbClr val="2C3A33"/>
                 </a:solidFill>
-                <a:latin typeface="Karla"/>
+                <a:latin typeface="Calibri"/>
               </a:rPr>
               <a:t>Check it against your four criteria before you eat it.</a:t>
             </a:r>
@@ -17889,7 +17273,7 @@
                 <a:solidFill>
                   <a:srgbClr val="256B4A"/>
                 </a:solidFill>
-                <a:latin typeface="Karla"/>
+                <a:latin typeface="Calibri"/>
               </a:rPr>
               <a:t>In pairs. The card on your table has the swaps if you need a different version.</a:t>
             </a:r>
@@ -17955,7 +17339,7 @@
                 <a:solidFill>
                   <a:srgbClr val="98A29B"/>
                 </a:solidFill>
-                <a:latin typeface="Karla"/>
+                <a:latin typeface="Calibri"/>
               </a:rPr>
               <a:t>The Pastoral Guide</a:t>
             </a:r>
@@ -17997,7 +17381,7 @@
                 <a:solidFill>
                   <a:srgbClr val="98A29B"/>
                 </a:solidFill>
-                <a:latin typeface="Karla"/>
+                <a:latin typeface="Calibri"/>
               </a:rPr>
               <a:t>8 / 17</a:t>
             </a:r>
@@ -18101,97 +17485,9 @@
                 <a:solidFill>
                   <a:srgbClr val="CBDFD6"/>
                 </a:solidFill>
-                <a:latin typeface="Karla"/>
+                <a:latin typeface="Calibri"/>
               </a:rPr>
               <a:t>GO</a:t>
-            </a:r>
-          </a:p>
-        </p:txBody>
-      </p:sp>
-      <p:sp>
-        <p:nvSpPr>
-          <p:cNvPr id="4" name="Rounded Rectangle 3"/>
-          <p:cNvSpPr/>
-          <p:nvPr/>
-        </p:nvSpPr>
-        <p:spPr>
-          <a:xfrm>
-            <a:off x="7086600" y="530352"/>
-            <a:ext cx="1371600" cy="347472"/>
-          </a:xfrm>
-          <a:prstGeom prst="roundRect">
-            <a:avLst>
-              <a:gd name="adj" fmla="val 50000"/>
-            </a:avLst>
-          </a:prstGeom>
-          <a:solidFill>
-            <a:srgbClr val="FFFDF7"/>
-          </a:solidFill>
-          <a:ln>
-            <a:noFill/>
-          </a:ln>
-          <a:effectLst/>
-        </p:spPr>
-        <p:style>
-          <a:lnRef idx="1">
-            <a:schemeClr val="accent1"/>
-          </a:lnRef>
-          <a:fillRef idx="3">
-            <a:schemeClr val="accent1"/>
-          </a:fillRef>
-          <a:effectRef idx="2">
-            <a:schemeClr val="accent1"/>
-          </a:effectRef>
-          <a:fontRef idx="minor">
-            <a:schemeClr val="lt1"/>
-          </a:fontRef>
-        </p:style>
-        <p:txBody>
-          <a:bodyPr rtlCol="0" anchor="ctr"/>
-          <a:lstStyle/>
-          <a:p>
-            <a:pPr algn="ctr"/>
-          </a:p>
-        </p:txBody>
-      </p:sp>
-      <p:sp>
-        <p:nvSpPr>
-          <p:cNvPr id="5" name="TextBox 4"/>
-          <p:cNvSpPr txBox="1"/>
-          <p:nvPr/>
-        </p:nvSpPr>
-        <p:spPr>
-          <a:xfrm>
-            <a:off x="7086600" y="589788"/>
-            <a:ext cx="1371600" cy="237744"/>
-          </a:xfrm>
-          <a:prstGeom prst="rect">
-            <a:avLst/>
-          </a:prstGeom>
-          <a:noFill/>
-        </p:spPr>
-        <p:txBody>
-          <a:bodyPr wrap="square" lIns="0" rIns="0" tIns="0" bIns="0" anchor="t">
-            <a:spAutoFit/>
-          </a:bodyPr>
-          <a:lstStyle/>
-          <a:p>
-            <a:pPr algn="ctr">
-              <a:lnSpc>
-                <a:spcPct val="125000"/>
-              </a:lnSpc>
-              <a:spcAft>
-                <a:spcPts val="0"/>
-              </a:spcAft>
-            </a:pPr>
-            <a:r>
-              <a:rPr sz="1000" b="1" i="0" spc="100">
-                <a:solidFill>
-                  <a:srgbClr val="256B4A"/>
-                </a:solidFill>
-                <a:latin typeface="Karla"/>
-              </a:rPr>
-              <a:t>MAKE IT</a:t>
             </a:r>
           </a:p>
         </p:txBody>
@@ -18227,11 +17523,11 @@
               </a:spcAft>
             </a:pPr>
             <a:r>
-              <a:rPr sz="4000" b="1" i="0">
+              <a:rPr sz="4000" b="0" i="0">
                 <a:solidFill>
                   <a:srgbClr val="FFFDF7"/>
                 </a:solidFill>
-                <a:latin typeface="Libre Caslon Display"/>
+                <a:latin typeface="Georgia"/>
               </a:rPr>
               <a:t>Fifteen minutes</a:t>
             </a:r>
@@ -18321,7 +17617,7 @@
                 <a:solidFill>
                   <a:srgbClr val="256B4A"/>
                 </a:solidFill>
-                <a:latin typeface="Karla"/>
+                <a:latin typeface="Calibri"/>
               </a:rPr>
               <a:t>Everything you need is on the table.</a:t>
             </a:r>
@@ -18411,7 +17707,7 @@
                 <a:solidFill>
                   <a:srgbClr val="256B4A"/>
                 </a:solidFill>
-                <a:latin typeface="Karla"/>
+                <a:latin typeface="Calibri"/>
               </a:rPr>
               <a:t>Follow the card, not the person next to you.</a:t>
             </a:r>
@@ -18501,7 +17797,7 @@
                 <a:solidFill>
                   <a:srgbClr val="256B4A"/>
                 </a:solidFill>
-                <a:latin typeface="Karla"/>
+                <a:latin typeface="Calibri"/>
               </a:rPr>
               <a:t>Clear up as you go; it saves time at the end.</a:t>
             </a:r>
@@ -18635,7 +17931,7 @@
                 <a:solidFill>
                   <a:srgbClr val="CBDFD6"/>
                 </a:solidFill>
-                <a:latin typeface="Karla"/>
+                <a:latin typeface="Calibri"/>
               </a:rPr>
               <a:t>The Pastoral Guide</a:t>
             </a:r>
@@ -18677,7 +17973,7 @@
                 <a:solidFill>
                   <a:srgbClr val="CBDFD6"/>
                 </a:solidFill>
-                <a:latin typeface="Karla"/>
+                <a:latin typeface="Calibri"/>
               </a:rPr>
               <a:t>9 / 17</a:t>
             </a:r>
